--- a/presentation/finale_präsentation_mobileGIS_G3.pptx
+++ b/presentation/finale_präsentation_mobileGIS_G3.pptx
@@ -15,7 +15,7 @@
     <p:sldId id="350" r:id="rId6"/>
     <p:sldId id="351" r:id="rId7"/>
     <p:sldId id="352" r:id="rId8"/>
-    <p:sldId id="353" r:id="rId9"/>
+    <p:sldId id="356" r:id="rId9"/>
     <p:sldId id="354" r:id="rId10"/>
     <p:sldId id="303" r:id="rId11"/>
     <p:sldId id="259" r:id="rId12"/>
@@ -132,18 +132,30 @@
 </file>
 
 <file path=ppt/diagrams/colors1.xml><?xml version="1.0" encoding="utf-8"?>
-<dgm:colorsDef xmlns:dgm="http://schemas.openxmlformats.org/drawingml/2006/diagram" xmlns:a="http://schemas.openxmlformats.org/drawingml/2006/main" uniqueId="urn:microsoft.com/office/officeart/2005/8/colors/accent2_2">
+<dgm:colorsDef xmlns:dgm="http://schemas.openxmlformats.org/drawingml/2006/diagram" xmlns:a="http://schemas.openxmlformats.org/drawingml/2006/main" uniqueId="urn:microsoft.com/office/officeart/2005/8/colors/accent0_3">
   <dgm:title val=""/>
   <dgm:desc val=""/>
   <dgm:catLst>
-    <dgm:cat type="accent2" pri="11200"/>
+    <dgm:cat type="mainScheme" pri="10300"/>
   </dgm:catLst>
   <dgm:styleLbl name="node0">
     <dgm:fillClrLst meth="repeat">
-      <a:schemeClr val="accent2"/>
+      <a:schemeClr val="dk2"/>
     </dgm:fillClrLst>
     <dgm:linClrLst meth="repeat">
-      <a:schemeClr val="lt1"/>
+      <a:schemeClr val="lt2"/>
+    </dgm:linClrLst>
+    <dgm:effectClrLst/>
+    <dgm:txLinClrLst/>
+    <dgm:txFillClrLst/>
+    <dgm:txEffectClrLst/>
+  </dgm:styleLbl>
+  <dgm:styleLbl name="alignNode1">
+    <dgm:fillClrLst meth="repeat">
+      <a:schemeClr val="dk2"/>
+    </dgm:fillClrLst>
+    <dgm:linClrLst meth="repeat">
+      <a:schemeClr val="dk2"/>
     </dgm:linClrLst>
     <dgm:effectClrLst/>
     <dgm:txLinClrLst/>
@@ -152,22 +164,10 @@
   </dgm:styleLbl>
   <dgm:styleLbl name="node1">
     <dgm:fillClrLst meth="repeat">
-      <a:schemeClr val="accent2"/>
+      <a:schemeClr val="dk2"/>
     </dgm:fillClrLst>
     <dgm:linClrLst meth="repeat">
-      <a:schemeClr val="lt1"/>
-    </dgm:linClrLst>
-    <dgm:effectClrLst/>
-    <dgm:txLinClrLst/>
-    <dgm:txFillClrLst/>
-    <dgm:txEffectClrLst/>
-  </dgm:styleLbl>
-  <dgm:styleLbl name="alignNode1">
-    <dgm:fillClrLst meth="repeat">
-      <a:schemeClr val="accent2"/>
-    </dgm:fillClrLst>
-    <dgm:linClrLst meth="repeat">
-      <a:schemeClr val="accent2"/>
+      <a:schemeClr val="lt2"/>
     </dgm:linClrLst>
     <dgm:effectClrLst/>
     <dgm:txLinClrLst/>
@@ -176,10 +176,10 @@
   </dgm:styleLbl>
   <dgm:styleLbl name="lnNode1">
     <dgm:fillClrLst meth="repeat">
-      <a:schemeClr val="accent2"/>
+      <a:schemeClr val="dk2"/>
     </dgm:fillClrLst>
     <dgm:linClrLst meth="repeat">
-      <a:schemeClr val="lt1"/>
+      <a:schemeClr val="lt2"/>
     </dgm:linClrLst>
     <dgm:effectClrLst/>
     <dgm:txLinClrLst/>
@@ -188,12 +188,12 @@
   </dgm:styleLbl>
   <dgm:styleLbl name="vennNode1">
     <dgm:fillClrLst meth="repeat">
-      <a:schemeClr val="accent2">
+      <a:schemeClr val="dk2">
         <a:alpha val="50000"/>
       </a:schemeClr>
     </dgm:fillClrLst>
     <dgm:linClrLst meth="repeat">
-      <a:schemeClr val="lt1"/>
+      <a:schemeClr val="lt2"/>
     </dgm:linClrLst>
     <dgm:effectClrLst/>
     <dgm:txLinClrLst/>
@@ -202,10 +202,10 @@
   </dgm:styleLbl>
   <dgm:styleLbl name="node2">
     <dgm:fillClrLst meth="repeat">
-      <a:schemeClr val="accent2"/>
+      <a:schemeClr val="dk2"/>
     </dgm:fillClrLst>
     <dgm:linClrLst meth="repeat">
-      <a:schemeClr val="lt1"/>
+      <a:schemeClr val="lt2"/>
     </dgm:linClrLst>
     <dgm:effectClrLst/>
     <dgm:txLinClrLst/>
@@ -214,10 +214,10 @@
   </dgm:styleLbl>
   <dgm:styleLbl name="node3">
     <dgm:fillClrLst meth="repeat">
-      <a:schemeClr val="accent2"/>
+      <a:schemeClr val="dk2"/>
     </dgm:fillClrLst>
     <dgm:linClrLst meth="repeat">
-      <a:schemeClr val="lt1"/>
+      <a:schemeClr val="lt2"/>
     </dgm:linClrLst>
     <dgm:effectClrLst/>
     <dgm:txLinClrLst/>
@@ -226,10 +226,10 @@
   </dgm:styleLbl>
   <dgm:styleLbl name="node4">
     <dgm:fillClrLst meth="repeat">
-      <a:schemeClr val="accent2"/>
+      <a:schemeClr val="dk2"/>
     </dgm:fillClrLst>
     <dgm:linClrLst meth="repeat">
-      <a:schemeClr val="lt1"/>
+      <a:schemeClr val="lt2"/>
     </dgm:linClrLst>
     <dgm:effectClrLst/>
     <dgm:txLinClrLst/>
@@ -238,60 +238,64 @@
   </dgm:styleLbl>
   <dgm:styleLbl name="fgImgPlace1">
     <dgm:fillClrLst meth="repeat">
-      <a:schemeClr val="accent2">
+      <a:schemeClr val="dk2">
         <a:tint val="50000"/>
       </a:schemeClr>
     </dgm:fillClrLst>
     <dgm:linClrLst meth="repeat">
-      <a:schemeClr val="lt1"/>
+      <a:schemeClr val="lt2"/>
     </dgm:linClrLst>
     <dgm:effectClrLst/>
     <dgm:txLinClrLst/>
     <dgm:txFillClrLst meth="repeat">
-      <a:schemeClr val="lt1"/>
+      <a:schemeClr val="lt2"/>
     </dgm:txFillClrLst>
     <dgm:txEffectClrLst/>
   </dgm:styleLbl>
   <dgm:styleLbl name="alignImgPlace1">
     <dgm:fillClrLst meth="repeat">
-      <a:schemeClr val="accent2">
+      <a:schemeClr val="dk2">
         <a:tint val="50000"/>
       </a:schemeClr>
     </dgm:fillClrLst>
     <dgm:linClrLst meth="repeat">
-      <a:schemeClr val="lt1"/>
+      <a:schemeClr val="dk2">
+        <a:shade val="80000"/>
+      </a:schemeClr>
     </dgm:linClrLst>
     <dgm:effectClrLst/>
     <dgm:txLinClrLst/>
     <dgm:txFillClrLst meth="repeat">
-      <a:schemeClr val="lt1"/>
+      <a:schemeClr val="lt2"/>
     </dgm:txFillClrLst>
     <dgm:txEffectClrLst/>
   </dgm:styleLbl>
   <dgm:styleLbl name="bgImgPlace1">
     <dgm:fillClrLst meth="repeat">
-      <a:schemeClr val="accent2">
+      <a:schemeClr val="dk2">
         <a:tint val="50000"/>
       </a:schemeClr>
     </dgm:fillClrLst>
     <dgm:linClrLst meth="repeat">
-      <a:schemeClr val="lt1"/>
+      <a:schemeClr val="dk2">
+        <a:shade val="80000"/>
+      </a:schemeClr>
     </dgm:linClrLst>
     <dgm:effectClrLst/>
     <dgm:txLinClrLst/>
     <dgm:txFillClrLst meth="repeat">
-      <a:schemeClr val="lt1"/>
+      <a:schemeClr val="lt2"/>
     </dgm:txFillClrLst>
     <dgm:txEffectClrLst/>
   </dgm:styleLbl>
   <dgm:styleLbl name="sibTrans2D1">
     <dgm:fillClrLst meth="repeat">
-      <a:schemeClr val="accent2">
+      <a:schemeClr val="dk2">
         <a:tint val="60000"/>
       </a:schemeClr>
     </dgm:fillClrLst>
     <dgm:linClrLst meth="repeat">
-      <a:schemeClr val="accent2">
+      <a:schemeClr val="dk2">
         <a:tint val="60000"/>
       </a:schemeClr>
     </dgm:linClrLst>
@@ -302,12 +306,12 @@
   </dgm:styleLbl>
   <dgm:styleLbl name="fgSibTrans2D1">
     <dgm:fillClrLst meth="repeat">
-      <a:schemeClr val="accent2">
+      <a:schemeClr val="dk2">
         <a:tint val="60000"/>
       </a:schemeClr>
     </dgm:fillClrLst>
     <dgm:linClrLst meth="repeat">
-      <a:schemeClr val="accent2">
+      <a:schemeClr val="dk2">
         <a:tint val="60000"/>
       </a:schemeClr>
     </dgm:linClrLst>
@@ -318,12 +322,12 @@
   </dgm:styleLbl>
   <dgm:styleLbl name="bgSibTrans2D1">
     <dgm:fillClrLst meth="repeat">
-      <a:schemeClr val="accent2">
+      <a:schemeClr val="dk2">
         <a:tint val="60000"/>
       </a:schemeClr>
     </dgm:fillClrLst>
     <dgm:linClrLst meth="repeat">
-      <a:schemeClr val="accent2">
+      <a:schemeClr val="dk2">
         <a:tint val="60000"/>
       </a:schemeClr>
     </dgm:linClrLst>
@@ -334,40 +338,40 @@
   </dgm:styleLbl>
   <dgm:styleLbl name="sibTrans1D1">
     <dgm:fillClrLst meth="repeat">
-      <a:schemeClr val="accent2"/>
+      <a:schemeClr val="dk2"/>
     </dgm:fillClrLst>
     <dgm:linClrLst meth="repeat">
-      <a:schemeClr val="accent2"/>
+      <a:schemeClr val="dk2"/>
     </dgm:linClrLst>
     <dgm:effectClrLst/>
     <dgm:txLinClrLst/>
     <dgm:txFillClrLst meth="repeat">
-      <a:schemeClr val="tx1"/>
+      <a:schemeClr val="lt2"/>
     </dgm:txFillClrLst>
     <dgm:txEffectClrLst/>
   </dgm:styleLbl>
   <dgm:styleLbl name="callout">
     <dgm:fillClrLst meth="repeat">
-      <a:schemeClr val="accent2"/>
+      <a:schemeClr val="dk2"/>
     </dgm:fillClrLst>
     <dgm:linClrLst meth="repeat">
-      <a:schemeClr val="accent2">
+      <a:schemeClr val="dk2">
         <a:tint val="50000"/>
       </a:schemeClr>
     </dgm:linClrLst>
     <dgm:effectClrLst/>
     <dgm:txLinClrLst/>
     <dgm:txFillClrLst meth="repeat">
-      <a:schemeClr val="tx1"/>
+      <a:schemeClr val="lt2"/>
     </dgm:txFillClrLst>
     <dgm:txEffectClrLst/>
   </dgm:styleLbl>
   <dgm:styleLbl name="asst0">
     <dgm:fillClrLst meth="repeat">
-      <a:schemeClr val="accent2"/>
+      <a:schemeClr val="dk2"/>
     </dgm:fillClrLst>
     <dgm:linClrLst meth="repeat">
-      <a:schemeClr val="lt1"/>
+      <a:schemeClr val="lt2"/>
     </dgm:linClrLst>
     <dgm:effectClrLst/>
     <dgm:txLinClrLst/>
@@ -376,10 +380,10 @@
   </dgm:styleLbl>
   <dgm:styleLbl name="asst1">
     <dgm:fillClrLst meth="repeat">
-      <a:schemeClr val="accent2"/>
+      <a:schemeClr val="dk2"/>
     </dgm:fillClrLst>
     <dgm:linClrLst meth="repeat">
-      <a:schemeClr val="lt1"/>
+      <a:schemeClr val="lt2"/>
     </dgm:linClrLst>
     <dgm:effectClrLst/>
     <dgm:txLinClrLst/>
@@ -388,10 +392,10 @@
   </dgm:styleLbl>
   <dgm:styleLbl name="asst2">
     <dgm:fillClrLst meth="repeat">
-      <a:schemeClr val="accent2"/>
+      <a:schemeClr val="dk2"/>
     </dgm:fillClrLst>
     <dgm:linClrLst meth="repeat">
-      <a:schemeClr val="lt1"/>
+      <a:schemeClr val="lt2"/>
     </dgm:linClrLst>
     <dgm:effectClrLst/>
     <dgm:txLinClrLst/>
@@ -400,10 +404,10 @@
   </dgm:styleLbl>
   <dgm:styleLbl name="asst3">
     <dgm:fillClrLst meth="repeat">
-      <a:schemeClr val="accent2"/>
+      <a:schemeClr val="dk2"/>
     </dgm:fillClrLst>
     <dgm:linClrLst meth="repeat">
-      <a:schemeClr val="lt1"/>
+      <a:schemeClr val="lt2"/>
     </dgm:linClrLst>
     <dgm:effectClrLst/>
     <dgm:txLinClrLst/>
@@ -412,10 +416,10 @@
   </dgm:styleLbl>
   <dgm:styleLbl name="asst4">
     <dgm:fillClrLst meth="repeat">
-      <a:schemeClr val="accent2"/>
+      <a:schemeClr val="dk2"/>
     </dgm:fillClrLst>
     <dgm:linClrLst meth="repeat">
-      <a:schemeClr val="lt1"/>
+      <a:schemeClr val="lt2"/>
     </dgm:linClrLst>
     <dgm:effectClrLst/>
     <dgm:txLinClrLst/>
@@ -424,70 +428,70 @@
   </dgm:styleLbl>
   <dgm:styleLbl name="parChTrans2D1">
     <dgm:fillClrLst meth="repeat">
-      <a:schemeClr val="accent2">
+      <a:schemeClr val="dk2">
         <a:tint val="60000"/>
       </a:schemeClr>
     </dgm:fillClrLst>
     <dgm:linClrLst meth="repeat">
-      <a:schemeClr val="accent2">
+      <a:schemeClr val="dk2">
         <a:tint val="60000"/>
       </a:schemeClr>
     </dgm:linClrLst>
     <dgm:effectClrLst/>
     <dgm:txLinClrLst/>
     <dgm:txFillClrLst meth="repeat">
-      <a:schemeClr val="lt1"/>
+      <a:schemeClr val="lt2"/>
     </dgm:txFillClrLst>
     <dgm:txEffectClrLst/>
   </dgm:styleLbl>
   <dgm:styleLbl name="parChTrans2D2">
     <dgm:fillClrLst meth="repeat">
-      <a:schemeClr val="accent2"/>
+      <a:schemeClr val="dk2"/>
     </dgm:fillClrLst>
     <dgm:linClrLst meth="repeat">
-      <a:schemeClr val="accent2"/>
+      <a:schemeClr val="dk2"/>
     </dgm:linClrLst>
     <dgm:effectClrLst/>
     <dgm:txLinClrLst/>
     <dgm:txFillClrLst meth="repeat">
-      <a:schemeClr val="lt1"/>
+      <a:schemeClr val="lt2"/>
     </dgm:txFillClrLst>
     <dgm:txEffectClrLst/>
   </dgm:styleLbl>
   <dgm:styleLbl name="parChTrans2D3">
     <dgm:fillClrLst meth="repeat">
-      <a:schemeClr val="accent2"/>
+      <a:schemeClr val="dk2"/>
     </dgm:fillClrLst>
     <dgm:linClrLst meth="repeat">
-      <a:schemeClr val="accent2"/>
+      <a:schemeClr val="dk2"/>
     </dgm:linClrLst>
     <dgm:effectClrLst/>
     <dgm:txLinClrLst/>
     <dgm:txFillClrLst meth="repeat">
-      <a:schemeClr val="lt1"/>
+      <a:schemeClr val="lt2"/>
     </dgm:txFillClrLst>
     <dgm:txEffectClrLst/>
   </dgm:styleLbl>
   <dgm:styleLbl name="parChTrans2D4">
     <dgm:fillClrLst meth="repeat">
-      <a:schemeClr val="accent2"/>
+      <a:schemeClr val="dk2"/>
     </dgm:fillClrLst>
     <dgm:linClrLst meth="repeat">
-      <a:schemeClr val="accent2"/>
+      <a:schemeClr val="dk2"/>
     </dgm:linClrLst>
     <dgm:effectClrLst/>
     <dgm:txLinClrLst/>
     <dgm:txFillClrLst meth="repeat">
-      <a:schemeClr val="lt1"/>
+      <a:schemeClr val="lt2"/>
     </dgm:txFillClrLst>
     <dgm:txEffectClrLst/>
   </dgm:styleLbl>
   <dgm:styleLbl name="parChTrans1D1">
     <dgm:fillClrLst meth="repeat">
-      <a:schemeClr val="accent2"/>
+      <a:schemeClr val="dk2"/>
     </dgm:fillClrLst>
     <dgm:linClrLst meth="repeat">
-      <a:schemeClr val="accent2">
+      <a:schemeClr val="dk2">
         <a:shade val="60000"/>
       </a:schemeClr>
     </dgm:linClrLst>
@@ -500,10 +504,10 @@
   </dgm:styleLbl>
   <dgm:styleLbl name="parChTrans1D2">
     <dgm:fillClrLst meth="repeat">
-      <a:schemeClr val="accent2"/>
+      <a:schemeClr val="dk2"/>
     </dgm:fillClrLst>
     <dgm:linClrLst meth="repeat">
-      <a:schemeClr val="accent2">
+      <a:schemeClr val="dk2">
         <a:shade val="60000"/>
       </a:schemeClr>
     </dgm:linClrLst>
@@ -516,10 +520,10 @@
   </dgm:styleLbl>
   <dgm:styleLbl name="parChTrans1D3">
     <dgm:fillClrLst meth="repeat">
-      <a:schemeClr val="accent2"/>
+      <a:schemeClr val="dk2"/>
     </dgm:fillClrLst>
     <dgm:linClrLst meth="repeat">
-      <a:schemeClr val="accent2">
+      <a:schemeClr val="dk2">
         <a:shade val="80000"/>
       </a:schemeClr>
     </dgm:linClrLst>
@@ -532,10 +536,10 @@
   </dgm:styleLbl>
   <dgm:styleLbl name="parChTrans1D4">
     <dgm:fillClrLst meth="repeat">
-      <a:schemeClr val="accent2"/>
+      <a:schemeClr val="dk2"/>
     </dgm:fillClrLst>
     <dgm:linClrLst meth="repeat">
-      <a:schemeClr val="accent2">
+      <a:schemeClr val="dk2">
         <a:shade val="80000"/>
       </a:schemeClr>
     </dgm:linClrLst>
@@ -548,12 +552,12 @@
   </dgm:styleLbl>
   <dgm:styleLbl name="fgAcc1">
     <dgm:fillClrLst meth="repeat">
-      <a:schemeClr val="lt1">
+      <a:schemeClr val="lt2">
         <a:alpha val="90000"/>
       </a:schemeClr>
     </dgm:fillClrLst>
     <dgm:linClrLst meth="repeat">
-      <a:schemeClr val="accent2"/>
+      <a:schemeClr val="dk2"/>
     </dgm:linClrLst>
     <dgm:effectClrLst/>
     <dgm:txLinClrLst/>
@@ -564,12 +568,12 @@
   </dgm:styleLbl>
   <dgm:styleLbl name="conFgAcc1">
     <dgm:fillClrLst meth="repeat">
-      <a:schemeClr val="lt1">
+      <a:schemeClr val="lt2">
         <a:alpha val="90000"/>
       </a:schemeClr>
     </dgm:fillClrLst>
     <dgm:linClrLst meth="repeat">
-      <a:schemeClr val="accent2"/>
+      <a:schemeClr val="dk2"/>
     </dgm:linClrLst>
     <dgm:effectClrLst/>
     <dgm:txLinClrLst/>
@@ -580,12 +584,12 @@
   </dgm:styleLbl>
   <dgm:styleLbl name="alignAcc1">
     <dgm:fillClrLst meth="repeat">
-      <a:schemeClr val="lt1">
+      <a:schemeClr val="lt2">
         <a:alpha val="90000"/>
       </a:schemeClr>
     </dgm:fillClrLst>
     <dgm:linClrLst meth="repeat">
-      <a:schemeClr val="accent2"/>
+      <a:schemeClr val="dk2"/>
     </dgm:linClrLst>
     <dgm:effectClrLst/>
     <dgm:txLinClrLst/>
@@ -596,12 +600,12 @@
   </dgm:styleLbl>
   <dgm:styleLbl name="trAlignAcc1">
     <dgm:fillClrLst meth="repeat">
-      <a:schemeClr val="lt1">
+      <a:schemeClr val="lt2">
         <a:alpha val="40000"/>
       </a:schemeClr>
     </dgm:fillClrLst>
     <dgm:linClrLst meth="repeat">
-      <a:schemeClr val="accent2"/>
+      <a:schemeClr val="dk2"/>
     </dgm:linClrLst>
     <dgm:effectClrLst/>
     <dgm:txLinClrLst/>
@@ -612,12 +616,12 @@
   </dgm:styleLbl>
   <dgm:styleLbl name="bgAcc1">
     <dgm:fillClrLst meth="repeat">
-      <a:schemeClr val="lt1">
+      <a:schemeClr val="lt2">
         <a:alpha val="90000"/>
       </a:schemeClr>
     </dgm:fillClrLst>
     <dgm:linClrLst meth="repeat">
-      <a:schemeClr val="accent2"/>
+      <a:schemeClr val="dk2"/>
     </dgm:linClrLst>
     <dgm:effectClrLst/>
     <dgm:txLinClrLst/>
@@ -628,10 +632,10 @@
   </dgm:styleLbl>
   <dgm:styleLbl name="solidFgAcc1">
     <dgm:fillClrLst meth="repeat">
-      <a:schemeClr val="lt1"/>
+      <a:schemeClr val="lt2"/>
     </dgm:fillClrLst>
     <dgm:linClrLst meth="repeat">
-      <a:schemeClr val="accent2"/>
+      <a:schemeClr val="dk2"/>
     </dgm:linClrLst>
     <dgm:effectClrLst/>
     <dgm:txLinClrLst/>
@@ -642,10 +646,10 @@
   </dgm:styleLbl>
   <dgm:styleLbl name="solidAlignAcc1">
     <dgm:fillClrLst meth="repeat">
-      <a:schemeClr val="lt1"/>
+      <a:schemeClr val="lt2"/>
     </dgm:fillClrLst>
     <dgm:linClrLst meth="repeat">
-      <a:schemeClr val="accent2"/>
+      <a:schemeClr val="dk2"/>
     </dgm:linClrLst>
     <dgm:effectClrLst/>
     <dgm:txLinClrLst/>
@@ -656,10 +660,10 @@
   </dgm:styleLbl>
   <dgm:styleLbl name="solidBgAcc1">
     <dgm:fillClrLst meth="repeat">
-      <a:schemeClr val="lt1"/>
+      <a:schemeClr val="lt2"/>
     </dgm:fillClrLst>
     <dgm:linClrLst meth="repeat">
-      <a:schemeClr val="accent2"/>
+      <a:schemeClr val="dk2"/>
     </dgm:linClrLst>
     <dgm:effectClrLst/>
     <dgm:txLinClrLst/>
@@ -670,13 +674,13 @@
   </dgm:styleLbl>
   <dgm:styleLbl name="fgAccFollowNode1">
     <dgm:fillClrLst meth="repeat">
-      <a:schemeClr val="accent2">
+      <a:schemeClr val="dk2">
         <a:alpha val="90000"/>
         <a:tint val="40000"/>
       </a:schemeClr>
     </dgm:fillClrLst>
     <dgm:linClrLst meth="repeat">
-      <a:schemeClr val="accent2">
+      <a:schemeClr val="dk2">
         <a:alpha val="90000"/>
         <a:tint val="40000"/>
       </a:schemeClr>
@@ -690,13 +694,13 @@
   </dgm:styleLbl>
   <dgm:styleLbl name="alignAccFollowNode1">
     <dgm:fillClrLst meth="repeat">
-      <a:schemeClr val="accent2">
+      <a:schemeClr val="dk2">
         <a:alpha val="90000"/>
         <a:tint val="40000"/>
       </a:schemeClr>
     </dgm:fillClrLst>
     <dgm:linClrLst meth="repeat">
-      <a:schemeClr val="accent2">
+      <a:schemeClr val="dk2">
         <a:alpha val="90000"/>
         <a:tint val="40000"/>
       </a:schemeClr>
@@ -710,13 +714,13 @@
   </dgm:styleLbl>
   <dgm:styleLbl name="bgAccFollowNode1">
     <dgm:fillClrLst meth="repeat">
-      <a:schemeClr val="accent2">
+      <a:schemeClr val="dk2">
         <a:alpha val="90000"/>
         <a:tint val="40000"/>
       </a:schemeClr>
     </dgm:fillClrLst>
     <dgm:linClrLst meth="repeat">
-      <a:schemeClr val="accent2">
+      <a:schemeClr val="dk2">
         <a:alpha val="90000"/>
         <a:tint val="40000"/>
       </a:schemeClr>
@@ -730,12 +734,12 @@
   </dgm:styleLbl>
   <dgm:styleLbl name="fgAcc0">
     <dgm:fillClrLst meth="repeat">
-      <a:schemeClr val="lt1">
+      <a:schemeClr val="lt2">
         <a:alpha val="90000"/>
       </a:schemeClr>
     </dgm:fillClrLst>
     <dgm:linClrLst meth="repeat">
-      <a:schemeClr val="accent2"/>
+      <a:schemeClr val="dk2"/>
     </dgm:linClrLst>
     <dgm:effectClrLst/>
     <dgm:txLinClrLst/>
@@ -746,12 +750,12 @@
   </dgm:styleLbl>
   <dgm:styleLbl name="fgAcc2">
     <dgm:fillClrLst meth="repeat">
-      <a:schemeClr val="lt1">
+      <a:schemeClr val="lt2">
         <a:alpha val="90000"/>
       </a:schemeClr>
     </dgm:fillClrLst>
     <dgm:linClrLst meth="repeat">
-      <a:schemeClr val="accent2"/>
+      <a:schemeClr val="dk2"/>
     </dgm:linClrLst>
     <dgm:effectClrLst/>
     <dgm:txLinClrLst/>
@@ -762,12 +766,12 @@
   </dgm:styleLbl>
   <dgm:styleLbl name="fgAcc3">
     <dgm:fillClrLst meth="repeat">
-      <a:schemeClr val="lt1">
+      <a:schemeClr val="lt2">
         <a:alpha val="90000"/>
       </a:schemeClr>
     </dgm:fillClrLst>
     <dgm:linClrLst meth="repeat">
-      <a:schemeClr val="accent2"/>
+      <a:schemeClr val="dk2"/>
     </dgm:linClrLst>
     <dgm:effectClrLst/>
     <dgm:txLinClrLst/>
@@ -778,12 +782,12 @@
   </dgm:styleLbl>
   <dgm:styleLbl name="fgAcc4">
     <dgm:fillClrLst meth="repeat">
-      <a:schemeClr val="lt1">
+      <a:schemeClr val="lt2">
         <a:alpha val="90000"/>
       </a:schemeClr>
     </dgm:fillClrLst>
     <dgm:linClrLst meth="repeat">
-      <a:schemeClr val="accent2"/>
+      <a:schemeClr val="dk2"/>
     </dgm:linClrLst>
     <dgm:effectClrLst/>
     <dgm:txLinClrLst/>
@@ -794,12 +798,12 @@
   </dgm:styleLbl>
   <dgm:styleLbl name="bgShp">
     <dgm:fillClrLst meth="repeat">
-      <a:schemeClr val="accent2">
+      <a:schemeClr val="dk2">
         <a:tint val="40000"/>
       </a:schemeClr>
     </dgm:fillClrLst>
     <dgm:linClrLst meth="repeat">
-      <a:schemeClr val="accent2"/>
+      <a:schemeClr val="dk2"/>
     </dgm:linClrLst>
     <dgm:effectClrLst/>
     <dgm:txLinClrLst/>
@@ -810,12 +814,12 @@
   </dgm:styleLbl>
   <dgm:styleLbl name="dkBgShp">
     <dgm:fillClrLst meth="repeat">
-      <a:schemeClr val="accent2">
+      <a:schemeClr val="dk2">
         <a:shade val="80000"/>
       </a:schemeClr>
     </dgm:fillClrLst>
     <dgm:linClrLst meth="repeat">
-      <a:schemeClr val="accent2"/>
+      <a:schemeClr val="dk2"/>
     </dgm:linClrLst>
     <dgm:effectClrLst/>
     <dgm:txLinClrLst/>
@@ -826,13 +830,13 @@
   </dgm:styleLbl>
   <dgm:styleLbl name="trBgShp">
     <dgm:fillClrLst meth="repeat">
-      <a:schemeClr val="accent2">
+      <a:schemeClr val="dk2">
         <a:tint val="50000"/>
         <a:alpha val="40000"/>
       </a:schemeClr>
     </dgm:fillClrLst>
     <dgm:linClrLst meth="repeat">
-      <a:schemeClr val="accent2"/>
+      <a:schemeClr val="dk2"/>
     </dgm:linClrLst>
     <dgm:effectClrLst/>
     <dgm:txLinClrLst/>
@@ -843,12 +847,12 @@
   </dgm:styleLbl>
   <dgm:styleLbl name="fgShp">
     <dgm:fillClrLst meth="repeat">
-      <a:schemeClr val="accent2">
+      <a:schemeClr val="dk2">
         <a:tint val="60000"/>
       </a:schemeClr>
     </dgm:fillClrLst>
     <dgm:linClrLst meth="repeat">
-      <a:schemeClr val="lt1"/>
+      <a:schemeClr val="lt2"/>
     </dgm:linClrLst>
     <dgm:effectClrLst/>
     <dgm:txLinClrLst/>
@@ -859,7 +863,7 @@
   </dgm:styleLbl>
   <dgm:styleLbl name="revTx">
     <dgm:fillClrLst meth="repeat">
-      <a:schemeClr val="lt1">
+      <a:schemeClr val="lt2">
         <a:alpha val="0"/>
       </a:schemeClr>
     </dgm:fillClrLst>
@@ -882,7 +886,7 @@
 <dgm:dataModel xmlns:dgm="http://schemas.openxmlformats.org/drawingml/2006/diagram" xmlns:a="http://schemas.openxmlformats.org/drawingml/2006/main">
   <dgm:ptLst>
     <dgm:pt modelId="{6C5EF325-3217-488D-A23E-92AEAE00FA3F}" type="doc">
-      <dgm:prSet loTypeId="urn:microsoft.com/office/officeart/2018/2/layout/IconLabelList" loCatId="icon" qsTypeId="urn:microsoft.com/office/officeart/2005/8/quickstyle/simple1" qsCatId="simple" csTypeId="urn:microsoft.com/office/officeart/2005/8/colors/accent2_2" csCatId="accent2" phldr="1"/>
+      <dgm:prSet loTypeId="urn:microsoft.com/office/officeart/2018/2/layout/IconLabelList" loCatId="icon" qsTypeId="urn:microsoft.com/office/officeart/2005/8/quickstyle/simple1" qsCatId="simple" csTypeId="urn:microsoft.com/office/officeart/2005/8/colors/accent0_3" csCatId="mainScheme" phldr="1"/>
       <dgm:spPr/>
       <dgm:t>
         <a:bodyPr/>
@@ -905,10 +909,10 @@
             </a:lnSpc>
           </a:pPr>
           <a:r>
-            <a:rPr lang="en-GB"/>
+            <a:rPr lang="en-GB" dirty="0"/>
             <a:t>App idea</a:t>
           </a:r>
-          <a:endParaRPr lang="en-US"/>
+          <a:endParaRPr lang="en-US" dirty="0"/>
         </a:p>
       </dgm:t>
     </dgm:pt>
@@ -947,10 +951,10 @@
             </a:lnSpc>
           </a:pPr>
           <a:r>
-            <a:rPr lang="en-GB"/>
+            <a:rPr lang="en-GB" dirty="0"/>
             <a:t>General information </a:t>
           </a:r>
-          <a:endParaRPr lang="en-US"/>
+          <a:endParaRPr lang="en-US" dirty="0"/>
         </a:p>
       </dgm:t>
     </dgm:pt>
@@ -1134,14 +1138,11 @@
           </a:stretch>
         </a:blipFill>
         <a:ln>
-          <a:noFill/>
+          <a:solidFill>
+            <a:srgbClr val="FFFFFF"/>
+          </a:solidFill>
         </a:ln>
       </dgm:spPr>
-      <dgm:extLst>
-        <a:ext uri="{E40237B7-FDA0-4F09-8148-C483321AD2D9}">
-          <dgm14:cNvPr xmlns:dgm14="http://schemas.microsoft.com/office/drawing/2010/diagram" id="0" name="" descr="Glühlampe"/>
-        </a:ext>
-      </dgm:extLst>
     </dgm:pt>
     <dgm:pt modelId="{7604AE97-1652-4792-9063-A47DF631F527}" type="pres">
       <dgm:prSet presAssocID="{B41FFCBC-5507-4028-B08C-3E7EF0944A92}" presName="spaceRect" presStyleCnt="0"/>
@@ -1183,7 +1184,9 @@
           </a:stretch>
         </a:blipFill>
         <a:ln>
-          <a:noFill/>
+          <a:solidFill>
+            <a:srgbClr val="FFFFFF"/>
+          </a:solidFill>
         </a:ln>
       </dgm:spPr>
       <dgm:extLst>
@@ -1232,7 +1235,9 @@
           </a:stretch>
         </a:blipFill>
         <a:ln>
-          <a:noFill/>
+          <a:solidFill>
+            <a:srgbClr val="FFFFFF"/>
+          </a:solidFill>
         </a:ln>
       </dgm:spPr>
       <dgm:extLst>
@@ -1281,7 +1286,9 @@
           </a:stretch>
         </a:blipFill>
         <a:ln>
-          <a:noFill/>
+          <a:solidFill>
+            <a:srgbClr val="FFFFFF"/>
+          </a:solidFill>
         </a:ln>
       </dgm:spPr>
       <dgm:extLst>
@@ -1330,7 +1337,9 @@
           </a:stretch>
         </a:blipFill>
         <a:ln>
-          <a:noFill/>
+          <a:solidFill>
+            <a:srgbClr val="FFFFFF"/>
+          </a:solidFill>
         </a:ln>
       </dgm:spPr>
       <dgm:extLst>
@@ -1437,7 +1446,9 @@
           </a:stretch>
         </a:blipFill>
         <a:ln w="12700" cap="flat" cmpd="sng" algn="ctr">
-          <a:noFill/>
+          <a:solidFill>
+            <a:srgbClr val="FFFFFF"/>
+          </a:solidFill>
           <a:prstDash val="solid"/>
           <a:miter lim="800000"/>
         </a:ln>
@@ -1508,10 +1519,10 @@
             <a:buNone/>
           </a:pPr>
           <a:r>
-            <a:rPr lang="en-GB" sz="2400" kern="1200"/>
+            <a:rPr lang="en-GB" sz="2400" kern="1200" dirty="0"/>
             <a:t>App idea</a:t>
           </a:r>
-          <a:endParaRPr lang="en-US" sz="2400" kern="1200"/>
+          <a:endParaRPr lang="en-US" sz="2400" kern="1200" dirty="0"/>
         </a:p>
       </dsp:txBody>
       <dsp:txXfrm>
@@ -1548,7 +1559,9 @@
           </a:stretch>
         </a:blipFill>
         <a:ln w="12700" cap="flat" cmpd="sng" algn="ctr">
-          <a:noFill/>
+          <a:solidFill>
+            <a:srgbClr val="FFFFFF"/>
+          </a:solidFill>
           <a:prstDash val="solid"/>
           <a:miter lim="800000"/>
         </a:ln>
@@ -1619,10 +1632,10 @@
             <a:buNone/>
           </a:pPr>
           <a:r>
-            <a:rPr lang="en-GB" sz="2400" kern="1200"/>
+            <a:rPr lang="en-GB" sz="2400" kern="1200" dirty="0"/>
             <a:t>General information </a:t>
           </a:r>
-          <a:endParaRPr lang="en-US" sz="2400" kern="1200"/>
+          <a:endParaRPr lang="en-US" sz="2400" kern="1200" dirty="0"/>
         </a:p>
       </dsp:txBody>
       <dsp:txXfrm>
@@ -1659,7 +1672,9 @@
           </a:stretch>
         </a:blipFill>
         <a:ln w="12700" cap="flat" cmpd="sng" algn="ctr">
-          <a:noFill/>
+          <a:solidFill>
+            <a:srgbClr val="FFFFFF"/>
+          </a:solidFill>
           <a:prstDash val="solid"/>
           <a:miter lim="800000"/>
         </a:ln>
@@ -1770,7 +1785,9 @@
           </a:stretch>
         </a:blipFill>
         <a:ln w="12700" cap="flat" cmpd="sng" algn="ctr">
-          <a:noFill/>
+          <a:solidFill>
+            <a:srgbClr val="FFFFFF"/>
+          </a:solidFill>
           <a:prstDash val="solid"/>
           <a:miter lim="800000"/>
         </a:ln>
@@ -1881,7 +1898,9 @@
           </a:stretch>
         </a:blipFill>
         <a:ln w="12700" cap="flat" cmpd="sng" algn="ctr">
-          <a:noFill/>
+          <a:solidFill>
+            <a:srgbClr val="FFFFFF"/>
+          </a:solidFill>
           <a:prstDash val="solid"/>
           <a:miter lim="800000"/>
         </a:ln>
@@ -3273,7 +3292,7 @@
           <a:p>
             <a:fld id="{62F7697D-2204-4642-8F8E-DCE985B54DA6}" type="datetimeFigureOut">
               <a:rPr lang="de-DE" smtClean="0"/>
-              <a:t>22.07.2025</a:t>
+              <a:t>24.07.2025</a:t>
             </a:fld>
             <a:endParaRPr lang="de-DE" dirty="0"/>
           </a:p>
@@ -3579,7 +3598,7 @@
           <a:bodyPr/>
           <a:lstStyle/>
           <a:p>
-            <a:endParaRPr lang="de-DE" dirty="0"/>
+            <a:endParaRPr lang="en-GB" dirty="0"/>
           </a:p>
         </p:txBody>
       </p:sp>
@@ -3600,13 +3619,18 @@
           <a:p>
             <a:fld id="{BE3AC938-C7E8-444A-A4BB-EABBCAA0387F}" type="slidenum">
               <a:rPr lang="de-DE" smtClean="0"/>
-              <a:t>10</a:t>
+              <a:t>7</a:t>
             </a:fld>
             <a:endParaRPr lang="de-DE" dirty="0"/>
           </a:p>
         </p:txBody>
       </p:sp>
     </p:spTree>
+    <p:extLst>
+      <p:ext uri="{BB962C8B-B14F-4D97-AF65-F5344CB8AC3E}">
+        <p14:creationId xmlns:p14="http://schemas.microsoft.com/office/powerpoint/2010/main" val="4200067616"/>
+      </p:ext>
+    </p:extLst>
   </p:cSld>
   <p:clrMapOvr>
     <a:masterClrMapping/>
@@ -3679,7 +3703,7 @@
           <a:p>
             <a:fld id="{BE3AC938-C7E8-444A-A4BB-EABBCAA0387F}" type="slidenum">
               <a:rPr lang="de-DE" smtClean="0"/>
-              <a:t>11</a:t>
+              <a:t>10</a:t>
             </a:fld>
             <a:endParaRPr lang="de-DE" dirty="0"/>
           </a:p>
@@ -3758,7 +3782,7 @@
           <a:p>
             <a:fld id="{BE3AC938-C7E8-444A-A4BB-EABBCAA0387F}" type="slidenum">
               <a:rPr lang="de-DE" smtClean="0"/>
-              <a:t>12</a:t>
+              <a:t>11</a:t>
             </a:fld>
             <a:endParaRPr lang="de-DE" dirty="0"/>
           </a:p>
@@ -3837,7 +3861,7 @@
           <a:p>
             <a:fld id="{BE3AC938-C7E8-444A-A4BB-EABBCAA0387F}" type="slidenum">
               <a:rPr lang="de-DE" smtClean="0"/>
-              <a:t>13</a:t>
+              <a:t>12</a:t>
             </a:fld>
             <a:endParaRPr lang="de-DE" dirty="0"/>
           </a:p>
@@ -3916,7 +3940,7 @@
           <a:p>
             <a:fld id="{BE3AC938-C7E8-444A-A4BB-EABBCAA0387F}" type="slidenum">
               <a:rPr lang="de-DE" smtClean="0"/>
-              <a:t>14</a:t>
+              <a:t>13</a:t>
             </a:fld>
             <a:endParaRPr lang="de-DE" dirty="0"/>
           </a:p>
@@ -3995,7 +4019,7 @@
           <a:p>
             <a:fld id="{BE3AC938-C7E8-444A-A4BB-EABBCAA0387F}" type="slidenum">
               <a:rPr lang="de-DE" smtClean="0"/>
-              <a:t>15</a:t>
+              <a:t>14</a:t>
             </a:fld>
             <a:endParaRPr lang="de-DE" dirty="0"/>
           </a:p>
@@ -4010,6 +4034,85 @@
 </file>
 
 <file path=ppt/notesSlides/notesSlide7.xml><?xml version="1.0" encoding="utf-8"?>
+<p:notes xmlns:a="http://schemas.openxmlformats.org/drawingml/2006/main" xmlns:r="http://schemas.openxmlformats.org/officeDocument/2006/relationships" xmlns:p="http://schemas.openxmlformats.org/presentationml/2006/main">
+  <p:cSld>
+    <p:spTree>
+      <p:nvGrpSpPr>
+        <p:cNvPr id="1" name=""/>
+        <p:cNvGrpSpPr/>
+        <p:nvPr/>
+      </p:nvGrpSpPr>
+      <p:grpSpPr>
+        <a:xfrm>
+          <a:off x="0" y="0"/>
+          <a:ext cx="0" cy="0"/>
+          <a:chOff x="0" y="0"/>
+          <a:chExt cx="0" cy="0"/>
+        </a:xfrm>
+      </p:grpSpPr>
+      <p:sp>
+        <p:nvSpPr>
+          <p:cNvPr id="2" name="Folienbildplatzhalter 1"/>
+          <p:cNvSpPr>
+            <a:spLocks noGrp="1" noRot="1" noChangeAspect="1"/>
+          </p:cNvSpPr>
+          <p:nvPr>
+            <p:ph type="sldImg"/>
+          </p:nvPr>
+        </p:nvSpPr>
+        <p:spPr/>
+      </p:sp>
+      <p:sp>
+        <p:nvSpPr>
+          <p:cNvPr id="3" name="Notizenplatzhalter 2"/>
+          <p:cNvSpPr>
+            <a:spLocks noGrp="1"/>
+          </p:cNvSpPr>
+          <p:nvPr>
+            <p:ph type="body" idx="1"/>
+          </p:nvPr>
+        </p:nvSpPr>
+        <p:spPr/>
+        <p:txBody>
+          <a:bodyPr/>
+          <a:lstStyle/>
+          <a:p>
+            <a:endParaRPr lang="de-DE" dirty="0"/>
+          </a:p>
+        </p:txBody>
+      </p:sp>
+      <p:sp>
+        <p:nvSpPr>
+          <p:cNvPr id="4" name="Foliennummernplatzhalter 3"/>
+          <p:cNvSpPr>
+            <a:spLocks noGrp="1"/>
+          </p:cNvSpPr>
+          <p:nvPr>
+            <p:ph type="sldNum" sz="quarter" idx="5"/>
+          </p:nvPr>
+        </p:nvSpPr>
+        <p:spPr/>
+        <p:txBody>
+          <a:bodyPr/>
+          <a:lstStyle/>
+          <a:p>
+            <a:fld id="{BE3AC938-C7E8-444A-A4BB-EABBCAA0387F}" type="slidenum">
+              <a:rPr lang="de-DE" smtClean="0"/>
+              <a:t>15</a:t>
+            </a:fld>
+            <a:endParaRPr lang="de-DE" dirty="0"/>
+          </a:p>
+        </p:txBody>
+      </p:sp>
+    </p:spTree>
+  </p:cSld>
+  <p:clrMapOvr>
+    <a:masterClrMapping/>
+  </p:clrMapOvr>
+</p:notes>
+</file>
+
+<file path=ppt/notesSlides/notesSlide8.xml><?xml version="1.0" encoding="utf-8"?>
 <p:notes xmlns:a="http://schemas.openxmlformats.org/drawingml/2006/main" xmlns:r="http://schemas.openxmlformats.org/officeDocument/2006/relationships" xmlns:p="http://schemas.openxmlformats.org/presentationml/2006/main">
   <p:cSld>
     <p:spTree>
@@ -5663,7 +5766,7 @@
           <a:p>
             <a:fld id="{0A9BFA6A-9A63-4E2D-92C0-C77BFA750EDB}" type="datetime1">
               <a:rPr lang="de-DE" noProof="0" smtClean="0"/>
-              <a:t>22.07.2025</a:t>
+              <a:t>24.07.2025</a:t>
             </a:fld>
             <a:endParaRPr lang="en-US" noProof="0"/>
           </a:p>
@@ -6028,7 +6131,7 @@
           <a:p>
             <a:fld id="{43A9179C-E631-47AA-B9CB-ABFD8F596650}" type="datetime1">
               <a:rPr lang="de-DE" smtClean="0"/>
-              <a:t>22.07.2025</a:t>
+              <a:t>24.07.2025</a:t>
             </a:fld>
             <a:endParaRPr lang="de-DE"/>
           </a:p>
@@ -6319,7 +6422,7 @@
           <a:p>
             <a:fld id="{43A9179C-E631-47AA-B9CB-ABFD8F596650}" type="datetime1">
               <a:rPr lang="de-DE" smtClean="0"/>
-              <a:t>22.07.2025</a:t>
+              <a:t>24.07.2025</a:t>
             </a:fld>
             <a:endParaRPr lang="de-DE"/>
           </a:p>
@@ -6836,7 +6939,7 @@
           <a:p>
             <a:fld id="{88C61DB6-D53F-456D-8864-56CE29C6E6BA}" type="datetime1">
               <a:rPr lang="de-DE" smtClean="0"/>
-              <a:t>22.07.2025</a:t>
+              <a:t>24.07.2025</a:t>
             </a:fld>
             <a:endParaRPr lang="de-DE"/>
           </a:p>
@@ -7283,7 +7386,7 @@
           <a:p>
             <a:fld id="{88C61DB6-D53F-456D-8864-56CE29C6E6BA}" type="datetime1">
               <a:rPr lang="de-DE" smtClean="0"/>
-              <a:t>22.07.2025</a:t>
+              <a:t>24.07.2025</a:t>
             </a:fld>
             <a:endParaRPr lang="de-DE"/>
           </a:p>
@@ -7410,7 +7513,7 @@
           <a:p>
             <a:fld id="{0A1BF2A7-198D-4BCD-8375-CAC66677F609}" type="datetime1">
               <a:rPr lang="de-DE" smtClean="0"/>
-              <a:t>22.07.2025</a:t>
+              <a:t>24.07.2025</a:t>
             </a:fld>
             <a:endParaRPr lang="de-DE"/>
           </a:p>
@@ -7704,7 +7807,7 @@
           <a:p>
             <a:fld id="{0A1BF2A7-198D-4BCD-8375-CAC66677F609}" type="datetime1">
               <a:rPr lang="de-DE" smtClean="0"/>
-              <a:t>22.07.2025</a:t>
+              <a:t>24.07.2025</a:t>
             </a:fld>
             <a:endParaRPr lang="de-DE"/>
           </a:p>
@@ -7905,7 +8008,7 @@
           <a:p>
             <a:fld id="{0A1BF2A7-198D-4BCD-8375-CAC66677F609}" type="datetime1">
               <a:rPr lang="de-DE" smtClean="0"/>
-              <a:t>22.07.2025</a:t>
+              <a:t>24.07.2025</a:t>
             </a:fld>
             <a:endParaRPr lang="de-DE"/>
           </a:p>
@@ -8032,7 +8135,7 @@
           <a:p>
             <a:fld id="{0A1BF2A7-198D-4BCD-8375-CAC66677F609}" type="datetime1">
               <a:rPr lang="de-DE" smtClean="0"/>
-              <a:t>22.07.2025</a:t>
+              <a:t>24.07.2025</a:t>
             </a:fld>
             <a:endParaRPr lang="de-DE"/>
           </a:p>
@@ -8244,7 +8347,7 @@
           <a:p>
             <a:fld id="{0A1BF2A7-198D-4BCD-8375-CAC66677F609}" type="datetime1">
               <a:rPr lang="de-DE" smtClean="0"/>
-              <a:t>22.07.2025</a:t>
+              <a:t>24.07.2025</a:t>
             </a:fld>
             <a:endParaRPr lang="de-DE"/>
           </a:p>
@@ -8445,7 +8548,7 @@
           <a:p>
             <a:fld id="{EF9F2463-8150-4DAA-877D-A146C8C8C60A}" type="datetime1">
               <a:rPr lang="de-DE" smtClean="0"/>
-              <a:t>22.07.2025</a:t>
+              <a:t>24.07.2025</a:t>
             </a:fld>
             <a:endParaRPr lang="de-DE"/>
           </a:p>
@@ -8702,7 +8805,7 @@
           <a:p>
             <a:fld id="{224C4683-D191-47F3-8302-BB2B36B1C86A}" type="datetime1">
               <a:rPr lang="de-DE" smtClean="0"/>
-              <a:t>22.07.2025</a:t>
+              <a:t>24.07.2025</a:t>
             </a:fld>
             <a:endParaRPr lang="de-DE"/>
           </a:p>
@@ -8893,7 +8996,7 @@
           <a:p>
             <a:fld id="{5E89BE91-4B1C-4025-AE57-60317864A3F3}" type="datetime1">
               <a:rPr lang="de-DE" smtClean="0"/>
-              <a:t>22.07.2025</a:t>
+              <a:t>24.07.2025</a:t>
             </a:fld>
             <a:endParaRPr lang="de-DE"/>
           </a:p>
@@ -9219,7 +9322,7 @@
           <a:p>
             <a:fld id="{3AD15D93-083F-4B89-951E-D5F35A1BBEC8}" type="datetime1">
               <a:rPr lang="de-DE" smtClean="0"/>
-              <a:t>22.07.2025</a:t>
+              <a:t>24.07.2025</a:t>
             </a:fld>
             <a:endParaRPr lang="de-DE"/>
           </a:p>
@@ -9506,7 +9609,7 @@
           <a:p>
             <a:fld id="{90C3E158-F33A-4782-AFB5-03A3FD6F0AB2}" type="datetime1">
               <a:rPr lang="de-DE" smtClean="0"/>
-              <a:t>22.07.2025</a:t>
+              <a:t>24.07.2025</a:t>
             </a:fld>
             <a:endParaRPr lang="de-DE"/>
           </a:p>
@@ -15693,7 +15796,7 @@
                   <a:spcPts val="600"/>
                 </a:spcAft>
               </a:pPr>
-              <a:t>22.07.2025</a:t>
+              <a:t>24.07.2025</a:t>
             </a:fld>
             <a:endParaRPr lang="en-US" noProof="0"/>
           </a:p>
@@ -15797,7 +15900,7 @@
             <p:ph idx="1"/>
             <p:extLst>
               <p:ext uri="{D42A27DB-BD31-4B8C-83A1-F6EECF244321}">
-                <p14:modId xmlns:p14="http://schemas.microsoft.com/office/powerpoint/2010/main" val="74192245"/>
+                <p14:modId xmlns:p14="http://schemas.microsoft.com/office/powerpoint/2010/main" val="3558064067"/>
               </p:ext>
             </p:extLst>
           </p:nvPr>
@@ -15864,6 +15967,9 @@
           <a:lstStyle/>
           <a:p>
             <a:pPr marL="0" indent="0">
+              <a:lnSpc>
+                <a:spcPct val="150000"/>
+              </a:lnSpc>
               <a:buNone/>
             </a:pPr>
             <a:r>
@@ -15872,24 +15978,44 @@
             </a:r>
           </a:p>
           <a:p>
+            <a:pPr>
+              <a:lnSpc>
+                <a:spcPct val="150000"/>
+              </a:lnSpc>
+            </a:pPr>
             <a:r>
               <a:rPr lang="en-GB" dirty="0"/>
               <a:t>explore the KIT Campus</a:t>
             </a:r>
           </a:p>
           <a:p>
+            <a:pPr>
+              <a:lnSpc>
+                <a:spcPct val="150000"/>
+              </a:lnSpc>
+            </a:pPr>
             <a:r>
               <a:rPr lang="en-GB" dirty="0"/>
               <a:t>easily find places to eat</a:t>
             </a:r>
           </a:p>
           <a:p>
+            <a:pPr>
+              <a:lnSpc>
+                <a:spcPct val="150000"/>
+              </a:lnSpc>
+            </a:pPr>
             <a:r>
               <a:rPr lang="en-GB" dirty="0"/>
               <a:t>know where buildings of interest are</a:t>
             </a:r>
           </a:p>
           <a:p>
+            <a:pPr>
+              <a:lnSpc>
+                <a:spcPct val="150000"/>
+              </a:lnSpc>
+            </a:pPr>
             <a:r>
               <a:rPr lang="en-GB" dirty="0"/>
               <a:t>learn more about monuments, memorials, squares, …</a:t>
@@ -15920,7 +16046,7 @@
           <a:p>
             <a:fld id="{0A9BFA6A-9A63-4E2D-92C0-C77BFA750EDB}" type="datetime1">
               <a:rPr lang="de-DE" noProof="0" smtClean="0"/>
-              <a:t>22.07.2025</a:t>
+              <a:t>24.07.2025</a:t>
             </a:fld>
             <a:endParaRPr lang="en-US" noProof="0"/>
           </a:p>
@@ -16039,33 +16165,55 @@
           <a:bodyPr/>
           <a:lstStyle/>
           <a:p>
+            <a:pPr>
+              <a:lnSpc>
+                <a:spcPct val="150000"/>
+              </a:lnSpc>
+            </a:pPr>
             <a:r>
               <a:rPr lang="en-GB" dirty="0"/>
               <a:t>Development of a hybrid web application for mobile devices</a:t>
             </a:r>
           </a:p>
           <a:p>
+            <a:pPr>
+              <a:lnSpc>
+                <a:spcPct val="150000"/>
+              </a:lnSpc>
+            </a:pPr>
             <a:r>
               <a:rPr lang="en-GB" dirty="0"/>
               <a:t>Used Software (Open Source): </a:t>
             </a:r>
           </a:p>
           <a:p>
-            <a:pPr lvl="1"/>
+            <a:pPr lvl="1">
+              <a:lnSpc>
+                <a:spcPct val="150000"/>
+              </a:lnSpc>
+            </a:pPr>
             <a:r>
               <a:rPr lang="en-GB" dirty="0"/>
               <a:t>App development: Apache Cordova</a:t>
             </a:r>
           </a:p>
           <a:p>
-            <a:pPr lvl="1"/>
+            <a:pPr lvl="1">
+              <a:lnSpc>
+                <a:spcPct val="150000"/>
+              </a:lnSpc>
+            </a:pPr>
             <a:r>
               <a:rPr lang="en-GB" dirty="0"/>
               <a:t>Styling: Leaflet</a:t>
             </a:r>
           </a:p>
           <a:p>
-            <a:pPr lvl="1"/>
+            <a:pPr lvl="1">
+              <a:lnSpc>
+                <a:spcPct val="150000"/>
+              </a:lnSpc>
+            </a:pPr>
             <a:r>
               <a:rPr lang="en-GB" dirty="0"/>
               <a:t>Weather data: Open-</a:t>
@@ -16077,6 +16225,11 @@
             <a:endParaRPr lang="en-GB" dirty="0"/>
           </a:p>
           <a:p>
+            <a:pPr>
+              <a:lnSpc>
+                <a:spcPct val="150000"/>
+              </a:lnSpc>
+            </a:pPr>
             <a:r>
               <a:rPr lang="en-GB" dirty="0"/>
               <a:t>Files: JavaScript, </a:t>
@@ -16115,7 +16268,7 @@
           <a:p>
             <a:fld id="{0A9BFA6A-9A63-4E2D-92C0-C77BFA750EDB}" type="datetime1">
               <a:rPr lang="de-DE" noProof="0" smtClean="0"/>
-              <a:t>22.07.2025</a:t>
+              <a:t>24.07.2025</a:t>
             </a:fld>
             <a:endParaRPr lang="en-US" noProof="0"/>
           </a:p>
@@ -16288,6 +16441,12 @@
           <a:lstStyle/>
           <a:p>
             <a:pPr marL="0" indent="0">
+              <a:lnSpc>
+                <a:spcPct val="100000"/>
+              </a:lnSpc>
+              <a:spcAft>
+                <a:spcPts val="600"/>
+              </a:spcAft>
               <a:buNone/>
             </a:pPr>
             <a:r>
@@ -16296,42 +16455,77 @@
             </a:r>
           </a:p>
           <a:p>
+            <a:pPr>
+              <a:lnSpc>
+                <a:spcPct val="100000"/>
+              </a:lnSpc>
+            </a:pPr>
             <a:r>
               <a:rPr lang="en-GB" dirty="0"/>
               <a:t>Buildings (university, office, …)</a:t>
             </a:r>
           </a:p>
           <a:p>
+            <a:pPr>
+              <a:lnSpc>
+                <a:spcPct val="100000"/>
+              </a:lnSpc>
+            </a:pPr>
             <a:r>
               <a:rPr lang="en-GB" dirty="0"/>
               <a:t>Parking places for cars &amp; bicycles</a:t>
             </a:r>
           </a:p>
           <a:p>
+            <a:pPr>
+              <a:lnSpc>
+                <a:spcPct val="100000"/>
+              </a:lnSpc>
+            </a:pPr>
             <a:r>
               <a:rPr lang="en-GB" dirty="0"/>
               <a:t>Parks and grassy areas</a:t>
             </a:r>
           </a:p>
           <a:p>
+            <a:pPr>
+              <a:lnSpc>
+                <a:spcPct val="100000"/>
+              </a:lnSpc>
+            </a:pPr>
             <a:r>
               <a:rPr lang="en-GB" dirty="0"/>
               <a:t>Public transport stops</a:t>
             </a:r>
           </a:p>
           <a:p>
+            <a:pPr>
+              <a:lnSpc>
+                <a:spcPct val="100000"/>
+              </a:lnSpc>
+            </a:pPr>
             <a:r>
               <a:rPr lang="en-GB" dirty="0"/>
               <a:t>Monuments/memorials</a:t>
             </a:r>
           </a:p>
           <a:p>
+            <a:pPr>
+              <a:lnSpc>
+                <a:spcPct val="100000"/>
+              </a:lnSpc>
+            </a:pPr>
             <a:r>
               <a:rPr lang="en-GB" dirty="0"/>
               <a:t>Squares</a:t>
             </a:r>
           </a:p>
           <a:p>
+            <a:pPr>
+              <a:lnSpc>
+                <a:spcPct val="100000"/>
+              </a:lnSpc>
+            </a:pPr>
             <a:r>
               <a:rPr lang="en-GB" dirty="0"/>
               <a:t>Restaurants, bars, cafes, …</a:t>
@@ -16379,7 +16573,7 @@
                   <a:spcPts val="600"/>
                 </a:spcAft>
               </a:pPr>
-              <a:t>22.07.2025</a:t>
+              <a:t>24.07.2025</a:t>
             </a:fld>
             <a:endParaRPr lang="en-US" noProof="0"/>
           </a:p>
@@ -16554,48 +16748,88 @@
           <a:bodyPr/>
           <a:lstStyle/>
           <a:p>
+            <a:pPr>
+              <a:lnSpc>
+                <a:spcPct val="100000"/>
+              </a:lnSpc>
+            </a:pPr>
             <a:r>
               <a:rPr lang="en-GB" dirty="0"/>
               <a:t>Visualization of map tiles using OSM/Leaflet</a:t>
             </a:r>
           </a:p>
           <a:p>
+            <a:pPr>
+              <a:lnSpc>
+                <a:spcPct val="100000"/>
+              </a:lnSpc>
+            </a:pPr>
             <a:r>
               <a:rPr lang="en-GB" dirty="0"/>
               <a:t>Zoom in &amp; out</a:t>
             </a:r>
           </a:p>
           <a:p>
+            <a:pPr>
+              <a:lnSpc>
+                <a:spcPct val="100000"/>
+              </a:lnSpc>
+            </a:pPr>
             <a:r>
               <a:rPr lang="en-GB" dirty="0"/>
               <a:t>Information about current position</a:t>
             </a:r>
           </a:p>
           <a:p>
+            <a:pPr>
+              <a:lnSpc>
+                <a:spcPct val="100000"/>
+              </a:lnSpc>
+            </a:pPr>
             <a:r>
               <a:rPr lang="en-GB" dirty="0"/>
               <a:t>Legend, filter by category</a:t>
             </a:r>
           </a:p>
           <a:p>
+            <a:pPr>
+              <a:lnSpc>
+                <a:spcPct val="100000"/>
+              </a:lnSpc>
+            </a:pPr>
             <a:r>
               <a:rPr lang="en-GB" dirty="0"/>
               <a:t>Information about points of interest at KIT campus</a:t>
             </a:r>
           </a:p>
           <a:p>
+            <a:pPr>
+              <a:lnSpc>
+                <a:spcPct val="100000"/>
+              </a:lnSpc>
+            </a:pPr>
             <a:r>
               <a:rPr lang="en-GB" dirty="0"/>
               <a:t>Routing to POI at the KIT campus</a:t>
             </a:r>
           </a:p>
           <a:p>
+            <a:pPr>
+              <a:lnSpc>
+                <a:spcPct val="100000"/>
+              </a:lnSpc>
+            </a:pPr>
             <a:r>
               <a:rPr lang="en-GB" dirty="0"/>
               <a:t>Button to get back to campus</a:t>
             </a:r>
           </a:p>
           <a:p>
+            <a:pPr>
+              <a:lnSpc>
+                <a:spcPct val="100000"/>
+              </a:lnSpc>
+            </a:pPr>
             <a:r>
               <a:rPr lang="en-GB" dirty="0"/>
               <a:t>Weather API</a:t>
@@ -16626,7 +16860,7 @@
           <a:p>
             <a:fld id="{43A9179C-E631-47AA-B9CB-ABFD8F596650}" type="datetime1">
               <a:rPr lang="de-DE" smtClean="0"/>
-              <a:t>22.07.2025</a:t>
+              <a:t>24.07.2025</a:t>
             </a:fld>
             <a:endParaRPr lang="de-DE"/>
           </a:p>
@@ -18049,12 +18283,449 @@
           <a:chExt cx="0" cy="0"/>
         </a:xfrm>
       </p:grpSpPr>
+      <p:sp>
+        <p:nvSpPr>
+          <p:cNvPr id="3" name="Inhaltsplatzhalter 2">
+            <a:extLst>
+              <a:ext uri="{FF2B5EF4-FFF2-40B4-BE49-F238E27FC236}">
+                <a16:creationId xmlns:a16="http://schemas.microsoft.com/office/drawing/2014/main" id="{F6F030A9-E8E8-B72E-F90F-B0D8FB74E7CB}"/>
+              </a:ext>
+            </a:extLst>
+          </p:cNvPr>
+          <p:cNvSpPr>
+            <a:spLocks noGrp="1"/>
+          </p:cNvSpPr>
+          <p:nvPr>
+            <p:ph sz="half" idx="1"/>
+          </p:nvPr>
+        </p:nvSpPr>
+        <p:spPr>
+          <a:xfrm>
+            <a:off x="533399" y="1583512"/>
+            <a:ext cx="9928123" cy="4593452"/>
+          </a:xfrm>
+        </p:spPr>
+        <p:txBody>
+          <a:bodyPr>
+            <a:noAutofit/>
+          </a:bodyPr>
+          <a:lstStyle/>
+          <a:p>
+            <a:pPr>
+              <a:lnSpc>
+                <a:spcPct val="120000"/>
+              </a:lnSpc>
+            </a:pPr>
+            <a:r>
+              <a:rPr lang="de-DE" dirty="0"/>
+              <a:t>Hybrid web </a:t>
+            </a:r>
+            <a:r>
+              <a:rPr lang="de-DE" dirty="0" err="1"/>
+              <a:t>app</a:t>
+            </a:r>
+            <a:r>
+              <a:rPr lang="de-DE" dirty="0"/>
+              <a:t> </a:t>
+            </a:r>
+            <a:r>
+              <a:rPr lang="de-DE" dirty="0" err="1"/>
+              <a:t>for</a:t>
+            </a:r>
+            <a:r>
+              <a:rPr lang="de-DE" dirty="0"/>
+              <a:t> </a:t>
+            </a:r>
+            <a:r>
+              <a:rPr lang="de-DE" dirty="0" err="1"/>
+              <a:t>exploring</a:t>
+            </a:r>
+            <a:r>
+              <a:rPr lang="de-DE" dirty="0"/>
+              <a:t> </a:t>
+            </a:r>
+            <a:r>
+              <a:rPr lang="de-DE" dirty="0" err="1"/>
+              <a:t>the</a:t>
+            </a:r>
+            <a:r>
+              <a:rPr lang="de-DE" dirty="0"/>
+              <a:t> KIT </a:t>
+            </a:r>
+            <a:r>
+              <a:rPr lang="de-DE" dirty="0" err="1"/>
+              <a:t>campus</a:t>
+            </a:r>
+            <a:endParaRPr lang="de-DE" dirty="0"/>
+          </a:p>
+          <a:p>
+            <a:pPr>
+              <a:lnSpc>
+                <a:spcPct val="120000"/>
+              </a:lnSpc>
+            </a:pPr>
+            <a:r>
+              <a:rPr lang="de-DE" dirty="0"/>
+              <a:t>Easy </a:t>
+            </a:r>
+            <a:r>
+              <a:rPr lang="de-DE" dirty="0" err="1"/>
+              <a:t>search</a:t>
+            </a:r>
+            <a:r>
+              <a:rPr lang="de-DE" dirty="0"/>
+              <a:t> &amp; </a:t>
+            </a:r>
+            <a:r>
+              <a:rPr lang="de-DE" dirty="0" err="1"/>
+              <a:t>navigation</a:t>
+            </a:r>
+            <a:r>
+              <a:rPr lang="de-DE" dirty="0"/>
+              <a:t> </a:t>
+            </a:r>
+            <a:r>
+              <a:rPr lang="de-DE" dirty="0" err="1"/>
+              <a:t>for</a:t>
+            </a:r>
+            <a:r>
+              <a:rPr lang="de-DE" dirty="0"/>
+              <a:t> </a:t>
+            </a:r>
+            <a:r>
+              <a:rPr lang="de-DE" dirty="0" err="1"/>
+              <a:t>buildings</a:t>
+            </a:r>
+            <a:r>
+              <a:rPr lang="de-DE" dirty="0"/>
+              <a:t>, </a:t>
+            </a:r>
+            <a:r>
+              <a:rPr lang="de-DE" dirty="0" err="1"/>
+              <a:t>monuments</a:t>
+            </a:r>
+            <a:r>
+              <a:rPr lang="de-DE" dirty="0"/>
+              <a:t> &amp; </a:t>
+            </a:r>
+            <a:r>
+              <a:rPr lang="de-DE" dirty="0" err="1"/>
+              <a:t>dining</a:t>
+            </a:r>
+            <a:r>
+              <a:rPr lang="de-DE" dirty="0"/>
+              <a:t> </a:t>
+            </a:r>
+            <a:r>
+              <a:rPr lang="de-DE" dirty="0" err="1"/>
+              <a:t>options</a:t>
+            </a:r>
+            <a:endParaRPr lang="de-DE" dirty="0"/>
+          </a:p>
+          <a:p>
+            <a:pPr>
+              <a:lnSpc>
+                <a:spcPct val="120000"/>
+              </a:lnSpc>
+            </a:pPr>
+            <a:r>
+              <a:rPr lang="de-DE" dirty="0"/>
+              <a:t>Real-time </a:t>
+            </a:r>
+            <a:r>
+              <a:rPr lang="de-DE" dirty="0" err="1"/>
+              <a:t>information</a:t>
+            </a:r>
+            <a:r>
+              <a:rPr lang="de-DE" dirty="0"/>
+              <a:t> on </a:t>
+            </a:r>
+            <a:r>
+              <a:rPr lang="de-DE" dirty="0" err="1"/>
+              <a:t>weather</a:t>
+            </a:r>
+            <a:endParaRPr lang="de-DE" dirty="0"/>
+          </a:p>
+          <a:p>
+            <a:pPr>
+              <a:lnSpc>
+                <a:spcPct val="120000"/>
+              </a:lnSpc>
+            </a:pPr>
+            <a:r>
+              <a:rPr lang="de-DE" dirty="0"/>
+              <a:t>Interactive </a:t>
+            </a:r>
+            <a:r>
+              <a:rPr lang="de-DE" dirty="0" err="1"/>
+              <a:t>map</a:t>
+            </a:r>
+            <a:r>
+              <a:rPr lang="de-DE" dirty="0"/>
+              <a:t> </a:t>
+            </a:r>
+            <a:r>
+              <a:rPr lang="de-DE" dirty="0" err="1"/>
+              <a:t>with</a:t>
+            </a:r>
+            <a:r>
+              <a:rPr lang="de-DE" dirty="0"/>
+              <a:t> </a:t>
+            </a:r>
+            <a:r>
+              <a:rPr lang="de-DE" dirty="0" err="1"/>
+              <a:t>filtering</a:t>
+            </a:r>
+            <a:r>
+              <a:rPr lang="de-DE" dirty="0"/>
+              <a:t>, zoom, and </a:t>
+            </a:r>
+            <a:r>
+              <a:rPr lang="de-DE" dirty="0" err="1"/>
+              <a:t>routing</a:t>
+            </a:r>
+            <a:r>
+              <a:rPr lang="de-DE" dirty="0"/>
+              <a:t> </a:t>
+            </a:r>
+            <a:r>
+              <a:rPr lang="de-DE" dirty="0" err="1"/>
+              <a:t>features</a:t>
+            </a:r>
+            <a:endParaRPr lang="de-DE" dirty="0"/>
+          </a:p>
+          <a:p>
+            <a:pPr>
+              <a:lnSpc>
+                <a:spcPct val="120000"/>
+              </a:lnSpc>
+            </a:pPr>
+            <a:r>
+              <a:rPr lang="de-DE" dirty="0"/>
+              <a:t>Integration </a:t>
+            </a:r>
+            <a:r>
+              <a:rPr lang="de-DE" dirty="0" err="1"/>
+              <a:t>of</a:t>
+            </a:r>
+            <a:r>
+              <a:rPr lang="de-DE" dirty="0"/>
+              <a:t> open </a:t>
+            </a:r>
+            <a:r>
+              <a:rPr lang="de-DE" dirty="0" err="1"/>
+              <a:t>data</a:t>
+            </a:r>
+            <a:r>
+              <a:rPr lang="de-DE" dirty="0"/>
+              <a:t> </a:t>
+            </a:r>
+            <a:r>
+              <a:rPr lang="de-DE" dirty="0" err="1"/>
+              <a:t>sources</a:t>
+            </a:r>
+            <a:endParaRPr lang="de-DE" dirty="0"/>
+          </a:p>
+          <a:p>
+            <a:pPr>
+              <a:lnSpc>
+                <a:spcPct val="120000"/>
+              </a:lnSpc>
+            </a:pPr>
+            <a:r>
+              <a:rPr lang="de-DE" dirty="0" err="1"/>
+              <a:t>Developed</a:t>
+            </a:r>
+            <a:r>
+              <a:rPr lang="de-DE" dirty="0"/>
+              <a:t> </a:t>
+            </a:r>
+            <a:r>
+              <a:rPr lang="de-DE" dirty="0" err="1"/>
+              <a:t>with</a:t>
+            </a:r>
+            <a:r>
+              <a:rPr lang="de-DE" dirty="0"/>
+              <a:t> Apache Cordova and </a:t>
+            </a:r>
+            <a:r>
+              <a:rPr lang="de-DE" dirty="0" err="1"/>
+              <a:t>Leaflet</a:t>
+            </a:r>
+            <a:endParaRPr lang="de-DE" dirty="0"/>
+          </a:p>
+          <a:p>
+            <a:pPr>
+              <a:lnSpc>
+                <a:spcPct val="120000"/>
+              </a:lnSpc>
+            </a:pPr>
+            <a:r>
+              <a:rPr lang="de-DE" dirty="0"/>
+              <a:t>Cross-</a:t>
+            </a:r>
+            <a:r>
+              <a:rPr lang="de-DE" dirty="0" err="1"/>
+              <a:t>platform</a:t>
+            </a:r>
+            <a:r>
+              <a:rPr lang="de-DE" dirty="0"/>
+              <a:t> </a:t>
+            </a:r>
+            <a:r>
+              <a:rPr lang="de-DE" dirty="0" err="1"/>
+              <a:t>usability</a:t>
+            </a:r>
+            <a:r>
+              <a:rPr lang="de-DE" dirty="0"/>
+              <a:t> (iOS, Android, web </a:t>
+            </a:r>
+            <a:r>
+              <a:rPr lang="de-DE" dirty="0" err="1"/>
+              <a:t>browsers</a:t>
+            </a:r>
+            <a:r>
+              <a:rPr lang="de-DE" dirty="0"/>
+              <a:t>)</a:t>
+            </a:r>
+          </a:p>
+          <a:p>
+            <a:pPr>
+              <a:lnSpc>
+                <a:spcPct val="120000"/>
+              </a:lnSpc>
+            </a:pPr>
+            <a:r>
+              <a:rPr lang="de-DE" dirty="0"/>
+              <a:t>Check </a:t>
+            </a:r>
+            <a:r>
+              <a:rPr lang="de-DE" dirty="0" err="1"/>
+              <a:t>the</a:t>
+            </a:r>
+            <a:r>
+              <a:rPr lang="de-DE" dirty="0"/>
+              <a:t> </a:t>
+            </a:r>
+            <a:r>
+              <a:rPr lang="de-DE" dirty="0" err="1"/>
+              <a:t>browser</a:t>
+            </a:r>
+            <a:r>
+              <a:rPr lang="de-DE" dirty="0"/>
+              <a:t> </a:t>
+            </a:r>
+            <a:r>
+              <a:rPr lang="de-DE" dirty="0" err="1"/>
+              <a:t>preview</a:t>
+            </a:r>
+            <a:r>
+              <a:rPr lang="de-DE" dirty="0"/>
+              <a:t>: </a:t>
+            </a:r>
+            <a:r>
+              <a:rPr lang="de-DE" dirty="0">
+                <a:hlinkClick r:id="rId3"/>
+              </a:rPr>
+              <a:t>https://20korvin01.github.io/www/</a:t>
+            </a:r>
+            <a:endParaRPr lang="de-DE" dirty="0"/>
+          </a:p>
+        </p:txBody>
+      </p:sp>
+      <p:sp>
+        <p:nvSpPr>
+          <p:cNvPr id="4" name="Datumsplatzhalter 3">
+            <a:extLst>
+              <a:ext uri="{FF2B5EF4-FFF2-40B4-BE49-F238E27FC236}">
+                <a16:creationId xmlns:a16="http://schemas.microsoft.com/office/drawing/2014/main" id="{000B1A7B-592A-0AC7-69AC-7F80A6C17D22}"/>
+              </a:ext>
+            </a:extLst>
+          </p:cNvPr>
+          <p:cNvSpPr>
+            <a:spLocks noGrp="1"/>
+          </p:cNvSpPr>
+          <p:nvPr>
+            <p:ph type="dt" sz="half" idx="10"/>
+          </p:nvPr>
+        </p:nvSpPr>
+        <p:spPr/>
+        <p:txBody>
+          <a:bodyPr/>
+          <a:lstStyle/>
+          <a:p>
+            <a:fld id="{43A9179C-E631-47AA-B9CB-ABFD8F596650}" type="datetime1">
+              <a:rPr lang="de-DE" smtClean="0"/>
+              <a:t>24.07.2025</a:t>
+            </a:fld>
+            <a:endParaRPr lang="de-DE"/>
+          </a:p>
+        </p:txBody>
+      </p:sp>
+      <p:sp>
+        <p:nvSpPr>
+          <p:cNvPr id="5" name="Foliennummernplatzhalter 4">
+            <a:extLst>
+              <a:ext uri="{FF2B5EF4-FFF2-40B4-BE49-F238E27FC236}">
+                <a16:creationId xmlns:a16="http://schemas.microsoft.com/office/drawing/2014/main" id="{87C4DB52-CD83-5FA3-4F49-56174BB5E1A2}"/>
+              </a:ext>
+            </a:extLst>
+          </p:cNvPr>
+          <p:cNvSpPr>
+            <a:spLocks noGrp="1"/>
+          </p:cNvSpPr>
+          <p:nvPr>
+            <p:ph type="sldNum" sz="quarter" idx="12"/>
+          </p:nvPr>
+        </p:nvSpPr>
+        <p:spPr/>
+        <p:txBody>
+          <a:bodyPr/>
+          <a:lstStyle/>
+          <a:p>
+            <a:fld id="{61696EC4-B4CF-4701-AD06-A8439D6D8E12}" type="slidenum">
+              <a:rPr lang="de-DE" smtClean="0"/>
+              <a:t>7</a:t>
+            </a:fld>
+            <a:endParaRPr lang="de-DE"/>
+          </a:p>
+        </p:txBody>
+      </p:sp>
+      <p:sp>
+        <p:nvSpPr>
+          <p:cNvPr id="6" name="Titel 5">
+            <a:extLst>
+              <a:ext uri="{FF2B5EF4-FFF2-40B4-BE49-F238E27FC236}">
+                <a16:creationId xmlns:a16="http://schemas.microsoft.com/office/drawing/2014/main" id="{2A78817F-33CC-B772-7ABE-84ABBA439E92}"/>
+              </a:ext>
+            </a:extLst>
+          </p:cNvPr>
+          <p:cNvSpPr>
+            <a:spLocks noGrp="1"/>
+          </p:cNvSpPr>
+          <p:nvPr>
+            <p:ph type="title"/>
+          </p:nvPr>
+        </p:nvSpPr>
+        <p:spPr/>
+        <p:txBody>
+          <a:bodyPr/>
+          <a:lstStyle/>
+          <a:p>
+            <a:r>
+              <a:rPr lang="de-DE" dirty="0"/>
+              <a:t>Summary</a:t>
+            </a:r>
+            <a:endParaRPr lang="en-GB" dirty="0"/>
+          </a:p>
+        </p:txBody>
+      </p:sp>
       <p:pic>
         <p:nvPicPr>
-          <p:cNvPr id="10" name="Grafik 9" descr="Ein Bild, das Muster, Design, Quadrat, Pixel enthält.&#10;&#10;KI-generierte Inhalte können fehlerhaft sein.">
+          <p:cNvPr id="10" name="Grafik 9" descr="Ein Bild, das Muster, Design, Grafiken, Quadrat enthält.&#10;&#10;KI-generierte Inhalte können fehlerhaft sein.">
             <a:extLst>
               <a:ext uri="{FF2B5EF4-FFF2-40B4-BE49-F238E27FC236}">
-                <a16:creationId xmlns:a16="http://schemas.microsoft.com/office/drawing/2014/main" id="{639BA910-EEF8-BF79-1B2F-539D0EC2E7C2}"/>
+                <a16:creationId xmlns:a16="http://schemas.microsoft.com/office/drawing/2014/main" id="{3F919E8D-8568-905B-CA0A-15B470253338}"/>
               </a:ext>
             </a:extLst>
           </p:cNvPr>
@@ -18064,504 +18735,32 @@
           <p:nvPr/>
         </p:nvPicPr>
         <p:blipFill>
-          <a:blip r:embed="rId2">
+          <a:blip r:embed="rId4">
             <a:extLst>
               <a:ext uri="{28A0092B-C50C-407E-A947-70E740481C1C}">
                 <a14:useLocalDpi xmlns:a14="http://schemas.microsoft.com/office/drawing/2010/main" val="0"/>
               </a:ext>
             </a:extLst>
           </a:blip>
+          <a:srcRect l="7851" t="7217" r="7975" b="8609"/>
           <a:stretch>
             <a:fillRect/>
           </a:stretch>
         </p:blipFill>
         <p:spPr>
           <a:xfrm>
-            <a:off x="9334500" y="1472215"/>
-            <a:ext cx="2857500" cy="2857500"/>
+            <a:off x="9258887" y="2673625"/>
+            <a:ext cx="2405269" cy="2405271"/>
           </a:xfrm>
           <a:prstGeom prst="rect">
             <a:avLst/>
           </a:prstGeom>
         </p:spPr>
       </p:pic>
-      <p:sp>
-        <p:nvSpPr>
-          <p:cNvPr id="8" name="Inhaltsplatzhalter 7">
-            <a:extLst>
-              <a:ext uri="{FF2B5EF4-FFF2-40B4-BE49-F238E27FC236}">
-                <a16:creationId xmlns:a16="http://schemas.microsoft.com/office/drawing/2014/main" id="{1F93556F-236B-084A-3A78-7DCFEDD48478}"/>
-              </a:ext>
-            </a:extLst>
-          </p:cNvPr>
-          <p:cNvSpPr>
-            <a:spLocks noGrp="1"/>
-          </p:cNvSpPr>
-          <p:nvPr>
-            <p:ph idx="1"/>
-          </p:nvPr>
-        </p:nvSpPr>
-        <p:spPr>
-          <a:xfrm>
-            <a:off x="375077" y="1018304"/>
-            <a:ext cx="9475549" cy="4704823"/>
-          </a:xfrm>
-        </p:spPr>
-        <p:txBody>
-          <a:bodyPr>
-            <a:normAutofit/>
-          </a:bodyPr>
-          <a:lstStyle/>
-          <a:p>
-            <a:pPr>
-              <a:lnSpc>
-                <a:spcPct val="120000"/>
-              </a:lnSpc>
-            </a:pPr>
-            <a:r>
-              <a:rPr lang="de-DE" dirty="0"/>
-              <a:t>Hybrid web </a:t>
-            </a:r>
-            <a:r>
-              <a:rPr lang="de-DE" dirty="0" err="1"/>
-              <a:t>app</a:t>
-            </a:r>
-            <a:r>
-              <a:rPr lang="de-DE" dirty="0"/>
-              <a:t> </a:t>
-            </a:r>
-            <a:r>
-              <a:rPr lang="de-DE" dirty="0" err="1"/>
-              <a:t>for</a:t>
-            </a:r>
-            <a:r>
-              <a:rPr lang="de-DE" dirty="0"/>
-              <a:t> </a:t>
-            </a:r>
-            <a:r>
-              <a:rPr lang="de-DE" dirty="0" err="1"/>
-              <a:t>exploring</a:t>
-            </a:r>
-            <a:r>
-              <a:rPr lang="de-DE" dirty="0"/>
-              <a:t> </a:t>
-            </a:r>
-            <a:r>
-              <a:rPr lang="de-DE" dirty="0" err="1"/>
-              <a:t>the</a:t>
-            </a:r>
-            <a:r>
-              <a:rPr lang="de-DE" dirty="0"/>
-              <a:t> KIT </a:t>
-            </a:r>
-            <a:r>
-              <a:rPr lang="de-DE" dirty="0" err="1"/>
-              <a:t>campus</a:t>
-            </a:r>
-            <a:endParaRPr lang="de-DE" dirty="0"/>
-          </a:p>
-          <a:p>
-            <a:pPr>
-              <a:lnSpc>
-                <a:spcPct val="120000"/>
-              </a:lnSpc>
-            </a:pPr>
-            <a:r>
-              <a:rPr lang="de-DE" dirty="0"/>
-              <a:t>Easy </a:t>
-            </a:r>
-            <a:r>
-              <a:rPr lang="de-DE" dirty="0" err="1"/>
-              <a:t>search</a:t>
-            </a:r>
-            <a:r>
-              <a:rPr lang="de-DE" dirty="0"/>
-              <a:t> &amp; </a:t>
-            </a:r>
-            <a:r>
-              <a:rPr lang="de-DE" dirty="0" err="1"/>
-              <a:t>navigation</a:t>
-            </a:r>
-            <a:r>
-              <a:rPr lang="de-DE" dirty="0"/>
-              <a:t> </a:t>
-            </a:r>
-            <a:r>
-              <a:rPr lang="de-DE" dirty="0" err="1"/>
-              <a:t>for</a:t>
-            </a:r>
-            <a:r>
-              <a:rPr lang="de-DE" dirty="0"/>
-              <a:t> </a:t>
-            </a:r>
-            <a:r>
-              <a:rPr lang="de-DE" dirty="0" err="1"/>
-              <a:t>buildings</a:t>
-            </a:r>
-            <a:r>
-              <a:rPr lang="de-DE" dirty="0"/>
-              <a:t>, </a:t>
-            </a:r>
-            <a:r>
-              <a:rPr lang="de-DE" dirty="0" err="1"/>
-              <a:t>monuments</a:t>
-            </a:r>
-            <a:r>
-              <a:rPr lang="de-DE" dirty="0"/>
-              <a:t> &amp; </a:t>
-            </a:r>
-            <a:r>
-              <a:rPr lang="de-DE" dirty="0" err="1"/>
-              <a:t>dining</a:t>
-            </a:r>
-            <a:r>
-              <a:rPr lang="de-DE" dirty="0"/>
-              <a:t> </a:t>
-            </a:r>
-            <a:r>
-              <a:rPr lang="de-DE" dirty="0" err="1"/>
-              <a:t>options</a:t>
-            </a:r>
-            <a:endParaRPr lang="de-DE" dirty="0"/>
-          </a:p>
-          <a:p>
-            <a:pPr>
-              <a:lnSpc>
-                <a:spcPct val="120000"/>
-              </a:lnSpc>
-            </a:pPr>
-            <a:r>
-              <a:rPr lang="de-DE" dirty="0"/>
-              <a:t>Real-time </a:t>
-            </a:r>
-            <a:r>
-              <a:rPr lang="de-DE" dirty="0" err="1"/>
-              <a:t>information</a:t>
-            </a:r>
-            <a:r>
-              <a:rPr lang="de-DE" dirty="0"/>
-              <a:t> on </a:t>
-            </a:r>
-            <a:r>
-              <a:rPr lang="de-DE" dirty="0" err="1"/>
-              <a:t>weather</a:t>
-            </a:r>
-            <a:r>
-              <a:rPr lang="de-DE" dirty="0"/>
-              <a:t>, </a:t>
-            </a:r>
-            <a:r>
-              <a:rPr lang="de-DE" dirty="0" err="1"/>
-              <a:t>parking</a:t>
-            </a:r>
-            <a:r>
-              <a:rPr lang="de-DE" dirty="0"/>
-              <a:t> &amp; </a:t>
-            </a:r>
-            <a:r>
-              <a:rPr lang="de-DE" dirty="0" err="1"/>
-              <a:t>public</a:t>
-            </a:r>
-            <a:r>
-              <a:rPr lang="de-DE" dirty="0"/>
-              <a:t> </a:t>
-            </a:r>
-            <a:r>
-              <a:rPr lang="de-DE" dirty="0" err="1"/>
-              <a:t>transport</a:t>
-            </a:r>
-            <a:endParaRPr lang="de-DE" dirty="0"/>
-          </a:p>
-          <a:p>
-            <a:pPr>
-              <a:lnSpc>
-                <a:spcPct val="120000"/>
-              </a:lnSpc>
-            </a:pPr>
-            <a:r>
-              <a:rPr lang="de-DE" dirty="0"/>
-              <a:t>Interactive </a:t>
-            </a:r>
-            <a:r>
-              <a:rPr lang="de-DE" dirty="0" err="1"/>
-              <a:t>map</a:t>
-            </a:r>
-            <a:r>
-              <a:rPr lang="de-DE" dirty="0"/>
-              <a:t> </a:t>
-            </a:r>
-            <a:r>
-              <a:rPr lang="de-DE" dirty="0" err="1"/>
-              <a:t>with</a:t>
-            </a:r>
-            <a:r>
-              <a:rPr lang="de-DE" dirty="0"/>
-              <a:t> </a:t>
-            </a:r>
-            <a:r>
-              <a:rPr lang="de-DE" dirty="0" err="1"/>
-              <a:t>filtering</a:t>
-            </a:r>
-            <a:r>
-              <a:rPr lang="de-DE" dirty="0"/>
-              <a:t>, zoom, and </a:t>
-            </a:r>
-            <a:r>
-              <a:rPr lang="de-DE" dirty="0" err="1"/>
-              <a:t>routing</a:t>
-            </a:r>
-            <a:r>
-              <a:rPr lang="de-DE" dirty="0"/>
-              <a:t> </a:t>
-            </a:r>
-            <a:r>
-              <a:rPr lang="de-DE" dirty="0" err="1"/>
-              <a:t>features</a:t>
-            </a:r>
-            <a:endParaRPr lang="de-DE" dirty="0"/>
-          </a:p>
-          <a:p>
-            <a:pPr>
-              <a:lnSpc>
-                <a:spcPct val="120000"/>
-              </a:lnSpc>
-            </a:pPr>
-            <a:r>
-              <a:rPr lang="de-DE" dirty="0"/>
-              <a:t>Integration </a:t>
-            </a:r>
-            <a:r>
-              <a:rPr lang="de-DE" dirty="0" err="1"/>
-              <a:t>of</a:t>
-            </a:r>
-            <a:r>
-              <a:rPr lang="de-DE" dirty="0"/>
-              <a:t> open </a:t>
-            </a:r>
-            <a:r>
-              <a:rPr lang="de-DE" dirty="0" err="1"/>
-              <a:t>data</a:t>
-            </a:r>
-            <a:r>
-              <a:rPr lang="de-DE" dirty="0"/>
-              <a:t> </a:t>
-            </a:r>
-            <a:r>
-              <a:rPr lang="de-DE" dirty="0" err="1"/>
-              <a:t>sources</a:t>
-            </a:r>
-            <a:r>
-              <a:rPr lang="de-DE" dirty="0"/>
-              <a:t> </a:t>
-            </a:r>
-          </a:p>
-          <a:p>
-            <a:pPr>
-              <a:lnSpc>
-                <a:spcPct val="120000"/>
-              </a:lnSpc>
-            </a:pPr>
-            <a:r>
-              <a:rPr lang="de-DE" dirty="0" err="1"/>
-              <a:t>Developed</a:t>
-            </a:r>
-            <a:r>
-              <a:rPr lang="de-DE" dirty="0"/>
-              <a:t> </a:t>
-            </a:r>
-            <a:r>
-              <a:rPr lang="de-DE" dirty="0" err="1"/>
-              <a:t>with</a:t>
-            </a:r>
-            <a:r>
-              <a:rPr lang="de-DE" dirty="0"/>
-              <a:t> Apache Cordova, </a:t>
-            </a:r>
-            <a:r>
-              <a:rPr lang="de-DE" dirty="0" err="1"/>
-              <a:t>Mapbox</a:t>
-            </a:r>
-            <a:r>
-              <a:rPr lang="de-DE" dirty="0"/>
-              <a:t> GL JS, and </a:t>
-            </a:r>
-            <a:r>
-              <a:rPr lang="de-DE" dirty="0" err="1"/>
-              <a:t>Leaflet</a:t>
-            </a:r>
-            <a:endParaRPr lang="de-DE" dirty="0"/>
-          </a:p>
-          <a:p>
-            <a:pPr>
-              <a:lnSpc>
-                <a:spcPct val="120000"/>
-              </a:lnSpc>
-            </a:pPr>
-            <a:r>
-              <a:rPr lang="de-DE" dirty="0"/>
-              <a:t>Cross-</a:t>
-            </a:r>
-            <a:r>
-              <a:rPr lang="de-DE" dirty="0" err="1"/>
-              <a:t>platform</a:t>
-            </a:r>
-            <a:r>
-              <a:rPr lang="de-DE" dirty="0"/>
-              <a:t> </a:t>
-            </a:r>
-            <a:r>
-              <a:rPr lang="de-DE" dirty="0" err="1"/>
-              <a:t>usability</a:t>
-            </a:r>
-            <a:r>
-              <a:rPr lang="de-DE" dirty="0"/>
-              <a:t> (iOS, Android, web </a:t>
-            </a:r>
-            <a:r>
-              <a:rPr lang="de-DE" dirty="0" err="1"/>
-              <a:t>browsers</a:t>
-            </a:r>
-            <a:r>
-              <a:rPr lang="de-DE" dirty="0"/>
-              <a:t>)</a:t>
-            </a:r>
-          </a:p>
-          <a:p>
-            <a:pPr>
-              <a:lnSpc>
-                <a:spcPct val="120000"/>
-              </a:lnSpc>
-            </a:pPr>
-            <a:r>
-              <a:rPr lang="de-DE" dirty="0" err="1"/>
-              <a:t>Get</a:t>
-            </a:r>
-            <a:r>
-              <a:rPr lang="de-DE" dirty="0"/>
-              <a:t> </a:t>
-            </a:r>
-            <a:r>
-              <a:rPr lang="de-DE" dirty="0" err="1"/>
-              <a:t>the</a:t>
-            </a:r>
-            <a:r>
-              <a:rPr lang="de-DE" dirty="0"/>
-              <a:t> source code </a:t>
-            </a:r>
-            <a:r>
-              <a:rPr lang="de-DE" dirty="0" err="1"/>
-              <a:t>from</a:t>
-            </a:r>
-            <a:r>
-              <a:rPr lang="de-DE" dirty="0"/>
-              <a:t> </a:t>
-            </a:r>
-            <a:r>
-              <a:rPr lang="de-DE" dirty="0">
-                <a:hlinkClick r:id="rId3"/>
-              </a:rPr>
-              <a:t>https://github.com/20korvin01/www/</a:t>
-            </a:r>
-            <a:endParaRPr lang="de-DE" dirty="0"/>
-          </a:p>
-        </p:txBody>
-      </p:sp>
-      <p:sp>
-        <p:nvSpPr>
-          <p:cNvPr id="4" name="Datumsplatzhalter 3">
-            <a:extLst>
-              <a:ext uri="{FF2B5EF4-FFF2-40B4-BE49-F238E27FC236}">
-                <a16:creationId xmlns:a16="http://schemas.microsoft.com/office/drawing/2014/main" id="{824C5C81-CD25-4ED0-2B7F-8DF8A65931EC}"/>
-              </a:ext>
-            </a:extLst>
-          </p:cNvPr>
-          <p:cNvSpPr>
-            <a:spLocks noGrp="1"/>
-          </p:cNvSpPr>
-          <p:nvPr>
-            <p:ph type="dt" sz="half" idx="10"/>
-          </p:nvPr>
-        </p:nvSpPr>
-        <p:spPr/>
-        <p:txBody>
-          <a:bodyPr/>
-          <a:lstStyle/>
-          <a:p>
-            <a:fld id="{43A9179C-E631-47AA-B9CB-ABFD8F596650}" type="datetime1">
-              <a:rPr lang="de-DE" smtClean="0"/>
-              <a:t>22.07.2025</a:t>
-            </a:fld>
-            <a:endParaRPr lang="de-DE"/>
-          </a:p>
-        </p:txBody>
-      </p:sp>
-      <p:sp>
-        <p:nvSpPr>
-          <p:cNvPr id="5" name="Foliennummernplatzhalter 4">
-            <a:extLst>
-              <a:ext uri="{FF2B5EF4-FFF2-40B4-BE49-F238E27FC236}">
-                <a16:creationId xmlns:a16="http://schemas.microsoft.com/office/drawing/2014/main" id="{C12F9FC3-D8CD-1793-E81C-5A16F58615AF}"/>
-              </a:ext>
-            </a:extLst>
-          </p:cNvPr>
-          <p:cNvSpPr>
-            <a:spLocks noGrp="1"/>
-          </p:cNvSpPr>
-          <p:nvPr>
-            <p:ph type="sldNum" sz="quarter" idx="12"/>
-          </p:nvPr>
-        </p:nvSpPr>
-        <p:spPr/>
-        <p:txBody>
-          <a:bodyPr/>
-          <a:lstStyle/>
-          <a:p>
-            <a:fld id="{61696EC4-B4CF-4701-AD06-A8439D6D8E12}" type="slidenum">
-              <a:rPr lang="de-DE" smtClean="0"/>
-              <a:t>7</a:t>
-            </a:fld>
-            <a:endParaRPr lang="de-DE"/>
-          </a:p>
-        </p:txBody>
-      </p:sp>
-      <p:sp>
-        <p:nvSpPr>
-          <p:cNvPr id="7" name="Titel 6">
-            <a:extLst>
-              <a:ext uri="{FF2B5EF4-FFF2-40B4-BE49-F238E27FC236}">
-                <a16:creationId xmlns:a16="http://schemas.microsoft.com/office/drawing/2014/main" id="{1903D55D-4452-0887-8CD3-CDF3018BF70D}"/>
-              </a:ext>
-            </a:extLst>
-          </p:cNvPr>
-          <p:cNvSpPr>
-            <a:spLocks noGrp="1"/>
-          </p:cNvSpPr>
-          <p:nvPr>
-            <p:ph type="title"/>
-          </p:nvPr>
-        </p:nvSpPr>
-        <p:spPr>
-          <a:xfrm>
-            <a:off x="533400" y="250556"/>
-            <a:ext cx="9158904" cy="767748"/>
-          </a:xfrm>
-        </p:spPr>
-        <p:txBody>
-          <a:bodyPr/>
-          <a:lstStyle/>
-          <a:p>
-            <a:r>
-              <a:rPr lang="de-DE" dirty="0"/>
-              <a:t>Summary</a:t>
-            </a:r>
-            <a:endParaRPr lang="en-GB" dirty="0"/>
-          </a:p>
-        </p:txBody>
-      </p:sp>
     </p:spTree>
     <p:extLst>
       <p:ext uri="{BB962C8B-B14F-4D97-AF65-F5344CB8AC3E}">
-        <p14:creationId xmlns:p14="http://schemas.microsoft.com/office/powerpoint/2010/main" val="2647458770"/>
+        <p14:creationId xmlns:p14="http://schemas.microsoft.com/office/powerpoint/2010/main" val="3642741895"/>
       </p:ext>
     </p:extLst>
   </p:cSld>
@@ -18609,6 +18808,11 @@
           <a:bodyPr/>
           <a:lstStyle/>
           <a:p>
+            <a:pPr>
+              <a:lnSpc>
+                <a:spcPct val="100000"/>
+              </a:lnSpc>
+            </a:pPr>
             <a:r>
               <a:rPr lang="de-DE" dirty="0"/>
               <a:t>Cordova: </a:t>
@@ -18622,6 +18826,11 @@
             <a:endParaRPr lang="de-DE" dirty="0"/>
           </a:p>
           <a:p>
+            <a:pPr>
+              <a:lnSpc>
+                <a:spcPct val="100000"/>
+              </a:lnSpc>
+            </a:pPr>
             <a:r>
               <a:rPr lang="de-DE" dirty="0"/>
               <a:t>Android Studio: </a:t>
@@ -18635,6 +18844,11 @@
             <a:endParaRPr lang="de-DE" dirty="0"/>
           </a:p>
           <a:p>
+            <a:pPr>
+              <a:lnSpc>
+                <a:spcPct val="100000"/>
+              </a:lnSpc>
+            </a:pPr>
             <a:r>
               <a:rPr lang="en-GB" dirty="0" err="1"/>
               <a:t>Mapbox</a:t>
@@ -18652,6 +18866,11 @@
             <a:endParaRPr lang="en-GB" dirty="0"/>
           </a:p>
           <a:p>
+            <a:pPr>
+              <a:lnSpc>
+                <a:spcPct val="100000"/>
+              </a:lnSpc>
+            </a:pPr>
             <a:r>
               <a:rPr lang="en-GB" dirty="0"/>
               <a:t>Leaflet: </a:t>
@@ -18665,6 +18884,11 @@
             <a:endParaRPr lang="en-GB" dirty="0"/>
           </a:p>
           <a:p>
+            <a:pPr>
+              <a:lnSpc>
+                <a:spcPct val="100000"/>
+              </a:lnSpc>
+            </a:pPr>
             <a:r>
               <a:rPr lang="en-GB" dirty="0"/>
               <a:t>OpenStreetMap: </a:t>
@@ -18678,6 +18902,11 @@
             <a:endParaRPr lang="en-GB" dirty="0"/>
           </a:p>
           <a:p>
+            <a:pPr>
+              <a:lnSpc>
+                <a:spcPct val="100000"/>
+              </a:lnSpc>
+            </a:pPr>
             <a:r>
               <a:rPr lang="en-GB" dirty="0"/>
               <a:t>Overpass Turbo: </a:t>
@@ -18691,6 +18920,11 @@
             <a:endParaRPr lang="en-GB" dirty="0"/>
           </a:p>
           <a:p>
+            <a:pPr>
+              <a:lnSpc>
+                <a:spcPct val="100000"/>
+              </a:lnSpc>
+            </a:pPr>
             <a:r>
               <a:rPr lang="en-GB" dirty="0"/>
               <a:t>Open-</a:t>
@@ -18709,9 +18943,6 @@
               </a:rPr>
               <a:t>https://open-meteo.com/</a:t>
             </a:r>
-            <a:endParaRPr lang="en-GB" dirty="0"/>
-          </a:p>
-          <a:p>
             <a:endParaRPr lang="en-GB" dirty="0"/>
           </a:p>
         </p:txBody>
@@ -18739,7 +18970,7 @@
           <a:p>
             <a:fld id="{0A9BFA6A-9A63-4E2D-92C0-C77BFA750EDB}" type="datetime1">
               <a:rPr lang="de-DE" noProof="0" smtClean="0"/>
-              <a:t>22.07.2025</a:t>
+              <a:t>24.07.2025</a:t>
             </a:fld>
             <a:endParaRPr lang="en-US" noProof="0"/>
           </a:p>

--- a/presentation/finale_präsentation_mobileGIS_G3.pptx
+++ b/presentation/finale_präsentation_mobileGIS_G3.pptx
@@ -6,7 +6,7 @@
     <p:sldMasterId id="2147483660" r:id="rId2"/>
   </p:sldMasterIdLst>
   <p:notesMasterIdLst>
-    <p:notesMasterId r:id="rId19"/>
+    <p:notesMasterId r:id="rId20"/>
   </p:notesMasterIdLst>
   <p:sldIdLst>
     <p:sldId id="347" r:id="rId3"/>
@@ -15,16 +15,17 @@
     <p:sldId id="350" r:id="rId6"/>
     <p:sldId id="351" r:id="rId7"/>
     <p:sldId id="352" r:id="rId8"/>
-    <p:sldId id="356" r:id="rId9"/>
-    <p:sldId id="354" r:id="rId10"/>
-    <p:sldId id="303" r:id="rId11"/>
-    <p:sldId id="259" r:id="rId12"/>
-    <p:sldId id="261" r:id="rId13"/>
-    <p:sldId id="304" r:id="rId14"/>
-    <p:sldId id="311" r:id="rId15"/>
-    <p:sldId id="345" r:id="rId16"/>
-    <p:sldId id="318" r:id="rId17"/>
-    <p:sldId id="307" r:id="rId18"/>
+    <p:sldId id="357" r:id="rId9"/>
+    <p:sldId id="356" r:id="rId10"/>
+    <p:sldId id="354" r:id="rId11"/>
+    <p:sldId id="303" r:id="rId12"/>
+    <p:sldId id="259" r:id="rId13"/>
+    <p:sldId id="261" r:id="rId14"/>
+    <p:sldId id="304" r:id="rId15"/>
+    <p:sldId id="311" r:id="rId16"/>
+    <p:sldId id="345" r:id="rId17"/>
+    <p:sldId id="318" r:id="rId18"/>
+    <p:sldId id="307" r:id="rId19"/>
   </p:sldIdLst>
   <p:sldSz cx="12192000" cy="6858000"/>
   <p:notesSz cx="6858000" cy="9144000"/>
@@ -3450,7 +3451,7 @@
           <a:p>
             <a:fld id="{BE3AC938-C7E8-444A-A4BB-EABBCAA0387F}" type="slidenum">
               <a:rPr lang="de-DE" smtClean="0"/>
-              <a:t>‹Nr.›</a:t>
+              <a:t>‹#›</a:t>
             </a:fld>
             <a:endParaRPr lang="de-DE" dirty="0"/>
           </a:p>
@@ -3619,7 +3620,7 @@
           <a:p>
             <a:fld id="{BE3AC938-C7E8-444A-A4BB-EABBCAA0387F}" type="slidenum">
               <a:rPr lang="de-DE" smtClean="0"/>
-              <a:t>7</a:t>
+              <a:t>8</a:t>
             </a:fld>
             <a:endParaRPr lang="de-DE" dirty="0"/>
           </a:p>
@@ -3703,7 +3704,7 @@
           <a:p>
             <a:fld id="{BE3AC938-C7E8-444A-A4BB-EABBCAA0387F}" type="slidenum">
               <a:rPr lang="de-DE" smtClean="0"/>
-              <a:t>10</a:t>
+              <a:t>11</a:t>
             </a:fld>
             <a:endParaRPr lang="de-DE" dirty="0"/>
           </a:p>
@@ -3782,7 +3783,7 @@
           <a:p>
             <a:fld id="{BE3AC938-C7E8-444A-A4BB-EABBCAA0387F}" type="slidenum">
               <a:rPr lang="de-DE" smtClean="0"/>
-              <a:t>11</a:t>
+              <a:t>12</a:t>
             </a:fld>
             <a:endParaRPr lang="de-DE" dirty="0"/>
           </a:p>
@@ -3861,7 +3862,7 @@
           <a:p>
             <a:fld id="{BE3AC938-C7E8-444A-A4BB-EABBCAA0387F}" type="slidenum">
               <a:rPr lang="de-DE" smtClean="0"/>
-              <a:t>12</a:t>
+              <a:t>13</a:t>
             </a:fld>
             <a:endParaRPr lang="de-DE" dirty="0"/>
           </a:p>
@@ -3940,7 +3941,7 @@
           <a:p>
             <a:fld id="{BE3AC938-C7E8-444A-A4BB-EABBCAA0387F}" type="slidenum">
               <a:rPr lang="de-DE" smtClean="0"/>
-              <a:t>13</a:t>
+              <a:t>14</a:t>
             </a:fld>
             <a:endParaRPr lang="de-DE" dirty="0"/>
           </a:p>
@@ -4019,7 +4020,7 @@
           <a:p>
             <a:fld id="{BE3AC938-C7E8-444A-A4BB-EABBCAA0387F}" type="slidenum">
               <a:rPr lang="de-DE" smtClean="0"/>
-              <a:t>14</a:t>
+              <a:t>15</a:t>
             </a:fld>
             <a:endParaRPr lang="de-DE" dirty="0"/>
           </a:p>
@@ -4098,7 +4099,7 @@
           <a:p>
             <a:fld id="{BE3AC938-C7E8-444A-A4BB-EABBCAA0387F}" type="slidenum">
               <a:rPr lang="de-DE" smtClean="0"/>
-              <a:t>15</a:t>
+              <a:t>16</a:t>
             </a:fld>
             <a:endParaRPr lang="de-DE" dirty="0"/>
           </a:p>
@@ -4177,7 +4178,7 @@
           <a:p>
             <a:fld id="{BE3AC938-C7E8-444A-A4BB-EABBCAA0387F}" type="slidenum">
               <a:rPr lang="de-DE" smtClean="0"/>
-              <a:t>16</a:t>
+              <a:t>17</a:t>
             </a:fld>
             <a:endParaRPr lang="de-DE" dirty="0"/>
           </a:p>
@@ -4366,7 +4367,7 @@
           <a:p>
             <a:fld id="{1152D26F-D91F-4BDA-B7C2-0B45ED53E507}" type="slidenum">
               <a:rPr lang="de-DE" smtClean="0"/>
-              <a:t>‹Nr.›</a:t>
+              <a:t>‹#›</a:t>
             </a:fld>
             <a:endParaRPr lang="de-DE" dirty="0"/>
           </a:p>
@@ -4533,7 +4534,7 @@
           <a:p>
             <a:fld id="{1152D26F-D91F-4BDA-B7C2-0B45ED53E507}" type="slidenum">
               <a:rPr lang="de-DE" smtClean="0"/>
-              <a:t>‹Nr.›</a:t>
+              <a:t>‹#›</a:t>
             </a:fld>
             <a:endParaRPr lang="de-DE" dirty="0"/>
           </a:p>
@@ -4710,7 +4711,7 @@
           <a:p>
             <a:fld id="{1152D26F-D91F-4BDA-B7C2-0B45ED53E507}" type="slidenum">
               <a:rPr lang="de-DE" smtClean="0"/>
-              <a:t>‹Nr.›</a:t>
+              <a:t>‹#›</a:t>
             </a:fld>
             <a:endParaRPr lang="de-DE" dirty="0"/>
           </a:p>
@@ -5793,7 +5794,7 @@
           <a:p>
             <a:fld id="{61696EC4-B4CF-4701-AD06-A8439D6D8E12}" type="slidenum">
               <a:rPr lang="en-US" noProof="0" smtClean="0"/>
-              <a:t>‹Nr.›</a:t>
+              <a:t>‹#›</a:t>
             </a:fld>
             <a:endParaRPr lang="en-US" noProof="0"/>
           </a:p>
@@ -6154,7 +6155,7 @@
           <a:p>
             <a:fld id="{61696EC4-B4CF-4701-AD06-A8439D6D8E12}" type="slidenum">
               <a:rPr lang="de-DE" smtClean="0"/>
-              <a:t>‹Nr.›</a:t>
+              <a:t>‹#›</a:t>
             </a:fld>
             <a:endParaRPr lang="de-DE"/>
           </a:p>
@@ -6445,7 +6446,7 @@
           <a:p>
             <a:fld id="{61696EC4-B4CF-4701-AD06-A8439D6D8E12}" type="slidenum">
               <a:rPr lang="de-DE" smtClean="0"/>
-              <a:t>‹Nr.›</a:t>
+              <a:t>‹#›</a:t>
             </a:fld>
             <a:endParaRPr lang="de-DE"/>
           </a:p>
@@ -6962,7 +6963,7 @@
           <a:p>
             <a:fld id="{61696EC4-B4CF-4701-AD06-A8439D6D8E12}" type="slidenum">
               <a:rPr lang="de-DE" smtClean="0"/>
-              <a:t>‹Nr.›</a:t>
+              <a:t>‹#›</a:t>
             </a:fld>
             <a:endParaRPr lang="de-DE"/>
           </a:p>
@@ -7409,7 +7410,7 @@
           <a:p>
             <a:fld id="{61696EC4-B4CF-4701-AD06-A8439D6D8E12}" type="slidenum">
               <a:rPr lang="de-DE" smtClean="0"/>
-              <a:t>‹Nr.›</a:t>
+              <a:t>‹#›</a:t>
             </a:fld>
             <a:endParaRPr lang="de-DE"/>
           </a:p>
@@ -7536,7 +7537,7 @@
           <a:p>
             <a:fld id="{61696EC4-B4CF-4701-AD06-A8439D6D8E12}" type="slidenum">
               <a:rPr lang="de-DE" smtClean="0"/>
-              <a:t>‹Nr.›</a:t>
+              <a:t>‹#›</a:t>
             </a:fld>
             <a:endParaRPr lang="de-DE"/>
           </a:p>
@@ -7759,7 +7760,7 @@
           <a:p>
             <a:fld id="{1152D26F-D91F-4BDA-B7C2-0B45ED53E507}" type="slidenum">
               <a:rPr lang="de-DE" smtClean="0"/>
-              <a:t>‹Nr.›</a:t>
+              <a:t>‹#›</a:t>
             </a:fld>
             <a:endParaRPr lang="de-DE" dirty="0"/>
           </a:p>
@@ -7830,7 +7831,7 @@
           <a:p>
             <a:fld id="{61696EC4-B4CF-4701-AD06-A8439D6D8E12}" type="slidenum">
               <a:rPr lang="de-DE" smtClean="0"/>
-              <a:t>‹Nr.›</a:t>
+              <a:t>‹#›</a:t>
             </a:fld>
             <a:endParaRPr lang="de-DE"/>
           </a:p>
@@ -8031,7 +8032,7 @@
           <a:p>
             <a:fld id="{61696EC4-B4CF-4701-AD06-A8439D6D8E12}" type="slidenum">
               <a:rPr lang="de-DE" smtClean="0"/>
-              <a:t>‹Nr.›</a:t>
+              <a:t>‹#›</a:t>
             </a:fld>
             <a:endParaRPr lang="de-DE"/>
           </a:p>
@@ -8158,7 +8159,7 @@
           <a:p>
             <a:fld id="{61696EC4-B4CF-4701-AD06-A8439D6D8E12}" type="slidenum">
               <a:rPr lang="de-DE" smtClean="0"/>
-              <a:t>‹Nr.›</a:t>
+              <a:t>‹#›</a:t>
             </a:fld>
             <a:endParaRPr lang="de-DE"/>
           </a:p>
@@ -8370,7 +8371,7 @@
           <a:p>
             <a:fld id="{61696EC4-B4CF-4701-AD06-A8439D6D8E12}" type="slidenum">
               <a:rPr lang="de-DE" smtClean="0"/>
-              <a:t>‹Nr.›</a:t>
+              <a:t>‹#›</a:t>
             </a:fld>
             <a:endParaRPr lang="de-DE"/>
           </a:p>
@@ -8571,7 +8572,7 @@
           <a:p>
             <a:fld id="{61696EC4-B4CF-4701-AD06-A8439D6D8E12}" type="slidenum">
               <a:rPr lang="de-DE" smtClean="0"/>
-              <a:t>‹Nr.›</a:t>
+              <a:t>‹#›</a:t>
             </a:fld>
             <a:endParaRPr lang="de-DE"/>
           </a:p>
@@ -8828,7 +8829,7 @@
           <a:p>
             <a:fld id="{61696EC4-B4CF-4701-AD06-A8439D6D8E12}" type="slidenum">
               <a:rPr lang="de-DE" smtClean="0"/>
-              <a:t>‹Nr.›</a:t>
+              <a:t>‹#›</a:t>
             </a:fld>
             <a:endParaRPr lang="de-DE"/>
           </a:p>
@@ -9019,7 +9020,7 @@
           <a:p>
             <a:fld id="{61696EC4-B4CF-4701-AD06-A8439D6D8E12}" type="slidenum">
               <a:rPr lang="de-DE" smtClean="0"/>
-              <a:t>‹Nr.›</a:t>
+              <a:t>‹#›</a:t>
             </a:fld>
             <a:endParaRPr lang="de-DE"/>
           </a:p>
@@ -9345,7 +9346,7 @@
           <a:p>
             <a:fld id="{61696EC4-B4CF-4701-AD06-A8439D6D8E12}" type="slidenum">
               <a:rPr lang="de-DE" smtClean="0"/>
-              <a:t>‹Nr.›</a:t>
+              <a:t>‹#›</a:t>
             </a:fld>
             <a:endParaRPr lang="de-DE"/>
           </a:p>
@@ -9632,7 +9633,7 @@
           <a:p>
             <a:fld id="{61696EC4-B4CF-4701-AD06-A8439D6D8E12}" type="slidenum">
               <a:rPr lang="de-DE" smtClean="0"/>
-              <a:t>‹Nr.›</a:t>
+              <a:t>‹#›</a:t>
             </a:fld>
             <a:endParaRPr lang="de-DE"/>
           </a:p>
@@ -9881,7 +9882,7 @@
           <a:p>
             <a:fld id="{1152D26F-D91F-4BDA-B7C2-0B45ED53E507}" type="slidenum">
               <a:rPr lang="de-DE" smtClean="0"/>
-              <a:t>‹Nr.›</a:t>
+              <a:t>‹#›</a:t>
             </a:fld>
             <a:endParaRPr lang="de-DE" dirty="0"/>
           </a:p>
@@ -10109,7 +10110,7 @@
           <a:p>
             <a:fld id="{1152D26F-D91F-4BDA-B7C2-0B45ED53E507}" type="slidenum">
               <a:rPr lang="de-DE" smtClean="0"/>
-              <a:t>‹Nr.›</a:t>
+              <a:t>‹#›</a:t>
             </a:fld>
             <a:endParaRPr lang="de-DE" dirty="0"/>
           </a:p>
@@ -10472,7 +10473,7 @@
           <a:p>
             <a:fld id="{1152D26F-D91F-4BDA-B7C2-0B45ED53E507}" type="slidenum">
               <a:rPr lang="de-DE" smtClean="0"/>
-              <a:t>‹Nr.›</a:t>
+              <a:t>‹#›</a:t>
             </a:fld>
             <a:endParaRPr lang="de-DE" dirty="0"/>
           </a:p>
@@ -10588,7 +10589,7 @@
           <a:p>
             <a:fld id="{1152D26F-D91F-4BDA-B7C2-0B45ED53E507}" type="slidenum">
               <a:rPr lang="de-DE" smtClean="0"/>
-              <a:t>‹Nr.›</a:t>
+              <a:t>‹#›</a:t>
             </a:fld>
             <a:endParaRPr lang="de-DE" dirty="0"/>
           </a:p>
@@ -10682,7 +10683,7 @@
           <a:p>
             <a:fld id="{1152D26F-D91F-4BDA-B7C2-0B45ED53E507}" type="slidenum">
               <a:rPr lang="de-DE" smtClean="0"/>
-              <a:t>‹Nr.›</a:t>
+              <a:t>‹#›</a:t>
             </a:fld>
             <a:endParaRPr lang="de-DE" dirty="0"/>
           </a:p>
@@ -10956,7 +10957,7 @@
           <a:p>
             <a:fld id="{1152D26F-D91F-4BDA-B7C2-0B45ED53E507}" type="slidenum">
               <a:rPr lang="de-DE" smtClean="0"/>
-              <a:t>‹Nr.›</a:t>
+              <a:t>‹#›</a:t>
             </a:fld>
             <a:endParaRPr lang="de-DE" dirty="0"/>
           </a:p>
@@ -11207,7 +11208,7 @@
           <a:p>
             <a:fld id="{1152D26F-D91F-4BDA-B7C2-0B45ED53E507}" type="slidenum">
               <a:rPr lang="de-DE" smtClean="0"/>
-              <a:t>‹Nr.›</a:t>
+              <a:t>‹#›</a:t>
             </a:fld>
             <a:endParaRPr lang="de-DE" dirty="0"/>
           </a:p>
@@ -11453,7 +11454,7 @@
           <a:p>
             <a:fld id="{1152D26F-D91F-4BDA-B7C2-0B45ED53E507}" type="slidenum">
               <a:rPr lang="de-DE" smtClean="0"/>
-              <a:t>‹Nr.›</a:t>
+              <a:t>‹#›</a:t>
             </a:fld>
             <a:endParaRPr lang="de-DE" dirty="0"/>
           </a:p>
@@ -11971,7 +11972,7 @@
             <a:fld id="{61696EC4-B4CF-4701-AD06-A8439D6D8E12}" type="slidenum">
               <a:rPr lang="en-US" smtClean="0"/>
               <a:pPr/>
-              <a:t>‹Nr.›</a:t>
+              <a:t>‹#›</a:t>
             </a:fld>
             <a:endParaRPr lang="en-US" dirty="0"/>
           </a:p>
@@ -12809,6 +12810,234 @@
 <file path=ppt/slides/slide10.xml><?xml version="1.0" encoding="utf-8"?>
 <p:sld xmlns:a="http://schemas.openxmlformats.org/drawingml/2006/main" xmlns:r="http://schemas.openxmlformats.org/officeDocument/2006/relationships" xmlns:p="http://schemas.openxmlformats.org/presentationml/2006/main" show="0">
   <p:cSld>
+    <p:spTree>
+      <p:nvGrpSpPr>
+        <p:cNvPr id="1" name=""/>
+        <p:cNvGrpSpPr/>
+        <p:nvPr/>
+      </p:nvGrpSpPr>
+      <p:grpSpPr>
+        <a:xfrm>
+          <a:off x="0" y="0"/>
+          <a:ext cx="0" cy="0"/>
+          <a:chOff x="0" y="0"/>
+          <a:chExt cx="0" cy="0"/>
+        </a:xfrm>
+      </p:grpSpPr>
+      <p:sp>
+        <p:nvSpPr>
+          <p:cNvPr id="2" name="Titel 1"/>
+          <p:cNvSpPr>
+            <a:spLocks noGrp="1"/>
+          </p:cNvSpPr>
+          <p:nvPr>
+            <p:ph type="ctrTitle"/>
+          </p:nvPr>
+        </p:nvSpPr>
+        <p:spPr>
+          <a:xfrm>
+            <a:off x="440267" y="1348141"/>
+            <a:ext cx="11232444" cy="2387600"/>
+          </a:xfrm>
+        </p:spPr>
+        <p:txBody>
+          <a:bodyPr/>
+          <a:lstStyle/>
+          <a:p>
+            <a:pPr algn="l"/>
+            <a:r>
+              <a:rPr lang="de-DE" dirty="0"/>
+              <a:t>Mobile GIS and LBS – </a:t>
+            </a:r>
+            <a:br>
+              <a:rPr lang="de-DE" dirty="0"/>
+            </a:br>
+            <a:r>
+              <a:rPr lang="de-DE" dirty="0"/>
+              <a:t>KIT Campus App</a:t>
+            </a:r>
+          </a:p>
+        </p:txBody>
+      </p:sp>
+      <p:sp>
+        <p:nvSpPr>
+          <p:cNvPr id="3" name="Untertitel 2"/>
+          <p:cNvSpPr>
+            <a:spLocks noGrp="1"/>
+          </p:cNvSpPr>
+          <p:nvPr>
+            <p:ph type="subTitle" idx="1"/>
+          </p:nvPr>
+        </p:nvSpPr>
+        <p:spPr>
+          <a:xfrm>
+            <a:off x="440267" y="3820137"/>
+            <a:ext cx="9144000" cy="1655762"/>
+          </a:xfrm>
+        </p:spPr>
+        <p:txBody>
+          <a:bodyPr>
+            <a:normAutofit/>
+          </a:bodyPr>
+          <a:lstStyle/>
+          <a:p>
+            <a:pPr algn="l"/>
+            <a:endParaRPr lang="en-US" dirty="0"/>
+          </a:p>
+          <a:p>
+            <a:pPr algn="l"/>
+            <a:r>
+              <a:rPr lang="en-US" sz="2200" dirty="0"/>
+              <a:t>Korvin Brecht; Jasmin Jährling; Elisabeth Kral;</a:t>
+            </a:r>
+            <a:r>
+              <a:rPr lang="de-DE" sz="2200" dirty="0"/>
+              <a:t> Merlin </a:t>
+            </a:r>
+            <a:r>
+              <a:rPr lang="de-DE" sz="2200" dirty="0" err="1"/>
+              <a:t>Pillich</a:t>
+            </a:r>
+            <a:endParaRPr lang="de-DE" sz="2200" dirty="0"/>
+          </a:p>
+          <a:p>
+            <a:pPr algn="l"/>
+            <a:r>
+              <a:rPr lang="de-DE" sz="2200" dirty="0"/>
+              <a:t>Mobile GIS &amp; LBS 2025 - Dr.-Ing. Paul Vincent Kuper</a:t>
+            </a:r>
+          </a:p>
+          <a:p>
+            <a:pPr algn="l"/>
+            <a:endParaRPr lang="en-US" dirty="0">
+              <a:hlinkClick r:id="rId2"/>
+            </a:endParaRPr>
+          </a:p>
+          <a:p>
+            <a:endParaRPr lang="de-DE" dirty="0"/>
+          </a:p>
+        </p:txBody>
+      </p:sp>
+      <p:pic>
+        <p:nvPicPr>
+          <p:cNvPr id="5" name="Grafik 4" descr="Ein Bild, das Schrift, Text, Grafiken, Logo enthält.&#10;&#10;KI-generierte Inhalte können fehlerhaft sein."/>
+          <p:cNvPicPr>
+            <a:picLocks noChangeAspect="1"/>
+          </p:cNvPicPr>
+          <p:nvPr/>
+        </p:nvPicPr>
+        <p:blipFill>
+          <a:blip r:embed="rId3">
+            <a:extLst>
+              <a:ext uri="{28A0092B-C50C-407E-A947-70E740481C1C}">
+                <a14:useLocalDpi xmlns:a14="http://schemas.microsoft.com/office/drawing/2010/main" val="0"/>
+              </a:ext>
+            </a:extLst>
+          </a:blip>
+          <a:stretch>
+            <a:fillRect/>
+          </a:stretch>
+        </p:blipFill>
+        <p:spPr>
+          <a:xfrm>
+            <a:off x="333251" y="402431"/>
+            <a:ext cx="2748616" cy="1255713"/>
+          </a:xfrm>
+          <a:prstGeom prst="rect">
+            <a:avLst/>
+          </a:prstGeom>
+        </p:spPr>
+      </p:pic>
+      <p:sp>
+        <p:nvSpPr>
+          <p:cNvPr id="6" name="Rechteck 5"/>
+          <p:cNvSpPr/>
+          <p:nvPr/>
+        </p:nvSpPr>
+        <p:spPr>
+          <a:xfrm>
+            <a:off x="333251" y="6309360"/>
+            <a:ext cx="11339460" cy="430403"/>
+          </a:xfrm>
+          <a:prstGeom prst="rect">
+            <a:avLst/>
+          </a:prstGeom>
+          <a:solidFill>
+            <a:srgbClr val="32A189"/>
+          </a:solidFill>
+          <a:ln>
+            <a:solidFill>
+              <a:schemeClr val="bg1">
+                <a:lumMod val="75000"/>
+              </a:schemeClr>
+            </a:solidFill>
+          </a:ln>
+        </p:spPr>
+        <p:style>
+          <a:lnRef idx="2">
+            <a:schemeClr val="accent1">
+              <a:shade val="15000"/>
+            </a:schemeClr>
+          </a:lnRef>
+          <a:fillRef idx="1">
+            <a:schemeClr val="accent1"/>
+          </a:fillRef>
+          <a:effectRef idx="0">
+            <a:schemeClr val="accent1"/>
+          </a:effectRef>
+          <a:fontRef idx="minor">
+            <a:schemeClr val="lt1"/>
+          </a:fontRef>
+        </p:style>
+        <p:txBody>
+          <a:bodyPr rtlCol="0" anchor="ctr"/>
+          <a:lstStyle/>
+          <a:p>
+            <a:pPr algn="ctr"/>
+            <a:endParaRPr lang="de-DE" dirty="0"/>
+          </a:p>
+        </p:txBody>
+      </p:sp>
+      <p:sp>
+        <p:nvSpPr>
+          <p:cNvPr id="8" name="Textfeld 7"/>
+          <p:cNvSpPr txBox="1"/>
+          <p:nvPr/>
+        </p:nvSpPr>
+        <p:spPr>
+          <a:xfrm>
+            <a:off x="333252" y="6393756"/>
+            <a:ext cx="4001682" cy="261610"/>
+          </a:xfrm>
+          <a:prstGeom prst="rect">
+            <a:avLst/>
+          </a:prstGeom>
+          <a:noFill/>
+        </p:spPr>
+        <p:txBody>
+          <a:bodyPr wrap="square" rtlCol="0">
+            <a:spAutoFit/>
+          </a:bodyPr>
+          <a:lstStyle/>
+          <a:p>
+            <a:r>
+              <a:rPr lang="de-DE" sz="1100" dirty="0"/>
+              <a:t>KIT – Die Forschungsuniversität der Helmholtz-Gemeinschaft</a:t>
+            </a:r>
+          </a:p>
+        </p:txBody>
+      </p:sp>
+    </p:spTree>
+  </p:cSld>
+  <p:clrMapOvr>
+    <a:masterClrMapping/>
+  </p:clrMapOvr>
+</p:sld>
+</file>
+
+<file path=ppt/slides/slide11.xml><?xml version="1.0" encoding="utf-8"?>
+<p:sld xmlns:a="http://schemas.openxmlformats.org/drawingml/2006/main" xmlns:r="http://schemas.openxmlformats.org/officeDocument/2006/relationships" xmlns:p="http://schemas.openxmlformats.org/presentationml/2006/main" show="0">
+  <p:cSld>
     <p:bg>
       <p:bgPr>
         <a:solidFill>
@@ -13417,7 +13646,7 @@
                   <a:schemeClr val="tx1"/>
                 </a:solidFill>
               </a:rPr>
-              <a:t>10</a:t>
+              <a:t>11</a:t>
             </a:fld>
             <a:endParaRPr lang="de-DE" dirty="0">
               <a:solidFill>
@@ -13514,7 +13743,7 @@
 </p:sld>
 </file>
 
-<file path=ppt/slides/slide11.xml><?xml version="1.0" encoding="utf-8"?>
+<file path=ppt/slides/slide12.xml><?xml version="1.0" encoding="utf-8"?>
 <p:sld xmlns:a="http://schemas.openxmlformats.org/drawingml/2006/main" xmlns:r="http://schemas.openxmlformats.org/officeDocument/2006/relationships" xmlns:p="http://schemas.openxmlformats.org/presentationml/2006/main" show="0">
   <p:cSld>
     <p:spTree>
@@ -13706,7 +13935,7 @@
                   <a:schemeClr val="tx1"/>
                 </a:solidFill>
               </a:rPr>
-              <a:t>11</a:t>
+              <a:t>12</a:t>
             </a:fld>
             <a:endParaRPr lang="de-DE" dirty="0">
               <a:solidFill>
@@ -13896,7 +14125,7 @@
 </p:sld>
 </file>
 
-<file path=ppt/slides/slide12.xml><?xml version="1.0" encoding="utf-8"?>
+<file path=ppt/slides/slide13.xml><?xml version="1.0" encoding="utf-8"?>
 <p:sld xmlns:a="http://schemas.openxmlformats.org/drawingml/2006/main" xmlns:r="http://schemas.openxmlformats.org/officeDocument/2006/relationships" xmlns:p="http://schemas.openxmlformats.org/presentationml/2006/main" show="0">
   <p:cSld>
     <p:spTree>
@@ -14083,7 +14312,7 @@
                   <a:schemeClr val="tx1"/>
                 </a:solidFill>
               </a:rPr>
-              <a:t>12</a:t>
+              <a:t>13</a:t>
             </a:fld>
             <a:endParaRPr lang="de-DE" dirty="0">
               <a:solidFill>
@@ -14242,7 +14471,7 @@
 </p:sld>
 </file>
 
-<file path=ppt/slides/slide13.xml><?xml version="1.0" encoding="utf-8"?>
+<file path=ppt/slides/slide14.xml><?xml version="1.0" encoding="utf-8"?>
 <p:sld xmlns:a="http://schemas.openxmlformats.org/drawingml/2006/main" xmlns:r="http://schemas.openxmlformats.org/officeDocument/2006/relationships" xmlns:p="http://schemas.openxmlformats.org/presentationml/2006/main" show="0">
   <p:cSld>
     <p:spTree>
@@ -14429,7 +14658,7 @@
                   <a:schemeClr val="tx1"/>
                 </a:solidFill>
               </a:rPr>
-              <a:t>13</a:t>
+              <a:t>14</a:t>
             </a:fld>
             <a:endParaRPr lang="de-DE" dirty="0">
               <a:solidFill>
@@ -14725,7 +14954,7 @@
 </p:sld>
 </file>
 
-<file path=ppt/slides/slide14.xml><?xml version="1.0" encoding="utf-8"?>
+<file path=ppt/slides/slide15.xml><?xml version="1.0" encoding="utf-8"?>
 <p:sld xmlns:a="http://schemas.openxmlformats.org/drawingml/2006/main" xmlns:r="http://schemas.openxmlformats.org/officeDocument/2006/relationships" xmlns:p="http://schemas.openxmlformats.org/presentationml/2006/main" show="0">
   <p:cSld>
     <p:spTree>
@@ -14912,7 +15141,7 @@
                   <a:schemeClr val="tx1"/>
                 </a:solidFill>
               </a:rPr>
-              <a:t>14</a:t>
+              <a:t>15</a:t>
             </a:fld>
             <a:endParaRPr lang="de-DE" dirty="0">
               <a:solidFill>
@@ -15135,7 +15364,7 @@
 </p:sld>
 </file>
 
-<file path=ppt/slides/slide15.xml><?xml version="1.0" encoding="utf-8"?>
+<file path=ppt/slides/slide16.xml><?xml version="1.0" encoding="utf-8"?>
 <p:sld xmlns:a="http://schemas.openxmlformats.org/drawingml/2006/main" xmlns:r="http://schemas.openxmlformats.org/officeDocument/2006/relationships" xmlns:p="http://schemas.openxmlformats.org/presentationml/2006/main" show="0">
   <p:cSld>
     <p:spTree>
@@ -15322,7 +15551,7 @@
                   <a:schemeClr val="tx1"/>
                 </a:solidFill>
               </a:rPr>
-              <a:t>15</a:t>
+              <a:t>16</a:t>
             </a:fld>
             <a:endParaRPr lang="de-DE" dirty="0">
               <a:solidFill>
@@ -15439,7 +15668,7 @@
 </p:sld>
 </file>
 
-<file path=ppt/slides/slide16.xml><?xml version="1.0" encoding="utf-8"?>
+<file path=ppt/slides/slide17.xml><?xml version="1.0" encoding="utf-8"?>
 <p:sld xmlns:a="http://schemas.openxmlformats.org/drawingml/2006/main" xmlns:r="http://schemas.openxmlformats.org/officeDocument/2006/relationships" xmlns:p="http://schemas.openxmlformats.org/presentationml/2006/main" show="0">
   <p:cSld>
     <p:spTree>
@@ -15626,7 +15855,7 @@
                   <a:schemeClr val="tx1"/>
                 </a:solidFill>
               </a:rPr>
-              <a:t>16</a:t>
+              <a:t>17</a:t>
             </a:fld>
             <a:endParaRPr lang="de-DE" dirty="0">
               <a:solidFill>
@@ -18285,6 +18514,209 @@
       </p:grpSpPr>
       <p:sp>
         <p:nvSpPr>
+          <p:cNvPr id="2" name="Content Placeholder 1">
+            <a:extLst>
+              <a:ext uri="{FF2B5EF4-FFF2-40B4-BE49-F238E27FC236}">
+                <a16:creationId xmlns:a16="http://schemas.microsoft.com/office/drawing/2014/main" id="{EE573E66-4FBF-9071-9AF1-5B318E8A6D42}"/>
+              </a:ext>
+            </a:extLst>
+          </p:cNvPr>
+          <p:cNvSpPr>
+            <a:spLocks noGrp="1"/>
+          </p:cNvSpPr>
+          <p:nvPr>
+            <p:ph idx="1"/>
+          </p:nvPr>
+        </p:nvSpPr>
+        <p:spPr>
+          <a:xfrm>
+            <a:off x="533400" y="1583512"/>
+            <a:ext cx="7750865" cy="4486472"/>
+          </a:xfrm>
+        </p:spPr>
+        <p:txBody>
+          <a:bodyPr/>
+          <a:lstStyle/>
+          <a:p>
+            <a:r>
+              <a:rPr lang="en-US" dirty="0"/>
+              <a:t>Cross-Origin Resource Sharing (CORS) Settings on WFS-Server</a:t>
+            </a:r>
+          </a:p>
+          <a:p>
+            <a:r>
+              <a:rPr lang="en-US" dirty="0"/>
+              <a:t>Fetching Files in JavaScript on iOS</a:t>
+            </a:r>
+          </a:p>
+          <a:p>
+            <a:r>
+              <a:rPr lang="en-US" dirty="0"/>
+              <a:t>Getting the Geolocation on iOS</a:t>
+            </a:r>
+          </a:p>
+          <a:p>
+            <a:r>
+              <a:rPr lang="en-US" dirty="0"/>
+              <a:t>UI experience when requesting location access inside a WebView on iOS</a:t>
+            </a:r>
+          </a:p>
+        </p:txBody>
+      </p:sp>
+      <p:sp>
+        <p:nvSpPr>
+          <p:cNvPr id="3" name="Date Placeholder 2">
+            <a:extLst>
+              <a:ext uri="{FF2B5EF4-FFF2-40B4-BE49-F238E27FC236}">
+                <a16:creationId xmlns:a16="http://schemas.microsoft.com/office/drawing/2014/main" id="{83BBD6EA-2D41-EC43-2BE1-EFA02B88EFD1}"/>
+              </a:ext>
+            </a:extLst>
+          </p:cNvPr>
+          <p:cNvSpPr>
+            <a:spLocks noGrp="1"/>
+          </p:cNvSpPr>
+          <p:nvPr>
+            <p:ph type="dt" sz="half" idx="10"/>
+          </p:nvPr>
+        </p:nvSpPr>
+        <p:spPr/>
+        <p:txBody>
+          <a:bodyPr/>
+          <a:lstStyle/>
+          <a:p>
+            <a:fld id="{0A9BFA6A-9A63-4E2D-92C0-C77BFA750EDB}" type="datetime1">
+              <a:rPr lang="de-DE" noProof="0" smtClean="0"/>
+              <a:t>24.07.2025</a:t>
+            </a:fld>
+            <a:endParaRPr lang="en-US" noProof="0"/>
+          </a:p>
+        </p:txBody>
+      </p:sp>
+      <p:sp>
+        <p:nvSpPr>
+          <p:cNvPr id="4" name="Slide Number Placeholder 3">
+            <a:extLst>
+              <a:ext uri="{FF2B5EF4-FFF2-40B4-BE49-F238E27FC236}">
+                <a16:creationId xmlns:a16="http://schemas.microsoft.com/office/drawing/2014/main" id="{6951B7A8-C5B4-2A90-C05B-323252718EC1}"/>
+              </a:ext>
+            </a:extLst>
+          </p:cNvPr>
+          <p:cNvSpPr>
+            <a:spLocks noGrp="1"/>
+          </p:cNvSpPr>
+          <p:nvPr>
+            <p:ph type="sldNum" sz="quarter" idx="12"/>
+          </p:nvPr>
+        </p:nvSpPr>
+        <p:spPr/>
+        <p:txBody>
+          <a:bodyPr/>
+          <a:lstStyle/>
+          <a:p>
+            <a:fld id="{61696EC4-B4CF-4701-AD06-A8439D6D8E12}" type="slidenum">
+              <a:rPr lang="en-US" noProof="0" smtClean="0"/>
+              <a:t>7</a:t>
+            </a:fld>
+            <a:endParaRPr lang="en-US" noProof="0"/>
+          </a:p>
+        </p:txBody>
+      </p:sp>
+      <p:sp>
+        <p:nvSpPr>
+          <p:cNvPr id="5" name="Title 4">
+            <a:extLst>
+              <a:ext uri="{FF2B5EF4-FFF2-40B4-BE49-F238E27FC236}">
+                <a16:creationId xmlns:a16="http://schemas.microsoft.com/office/drawing/2014/main" id="{A5621F79-81AD-88CC-B665-0B970D42CACC}"/>
+              </a:ext>
+            </a:extLst>
+          </p:cNvPr>
+          <p:cNvSpPr>
+            <a:spLocks noGrp="1"/>
+          </p:cNvSpPr>
+          <p:nvPr>
+            <p:ph type="title"/>
+          </p:nvPr>
+        </p:nvSpPr>
+        <p:spPr/>
+        <p:txBody>
+          <a:bodyPr/>
+          <a:lstStyle/>
+          <a:p>
+            <a:r>
+              <a:rPr lang="en-US" dirty="0"/>
+              <a:t>Difficulties</a:t>
+            </a:r>
+          </a:p>
+        </p:txBody>
+      </p:sp>
+      <p:pic>
+        <p:nvPicPr>
+          <p:cNvPr id="7" name="Picture 6" descr="A screen shot of a phone&#10;&#10;AI-generated content may be incorrect.">
+            <a:extLst>
+              <a:ext uri="{FF2B5EF4-FFF2-40B4-BE49-F238E27FC236}">
+                <a16:creationId xmlns:a16="http://schemas.microsoft.com/office/drawing/2014/main" id="{AE70A893-7807-E0DA-ECB4-61428E4B312A}"/>
+              </a:ext>
+            </a:extLst>
+          </p:cNvPr>
+          <p:cNvPicPr>
+            <a:picLocks noChangeAspect="1"/>
+          </p:cNvPicPr>
+          <p:nvPr/>
+        </p:nvPicPr>
+        <p:blipFill>
+          <a:blip r:embed="rId2" cstate="print">
+            <a:extLst>
+              <a:ext uri="{28A0092B-C50C-407E-A947-70E740481C1C}">
+                <a14:useLocalDpi xmlns:a14="http://schemas.microsoft.com/office/drawing/2010/main" val="0"/>
+              </a:ext>
+            </a:extLst>
+          </a:blip>
+          <a:stretch>
+            <a:fillRect/>
+          </a:stretch>
+        </p:blipFill>
+        <p:spPr>
+          <a:xfrm>
+            <a:off x="8724552" y="1162619"/>
+            <a:ext cx="2934048" cy="5106928"/>
+          </a:xfrm>
+          <a:prstGeom prst="rect">
+            <a:avLst/>
+          </a:prstGeom>
+        </p:spPr>
+      </p:pic>
+    </p:spTree>
+    <p:extLst>
+      <p:ext uri="{BB962C8B-B14F-4D97-AF65-F5344CB8AC3E}">
+        <p14:creationId xmlns:p14="http://schemas.microsoft.com/office/powerpoint/2010/main" val="1318366342"/>
+      </p:ext>
+    </p:extLst>
+  </p:cSld>
+  <p:clrMapOvr>
+    <a:masterClrMapping/>
+  </p:clrMapOvr>
+</p:sld>
+</file>
+
+<file path=ppt/slides/slide8.xml><?xml version="1.0" encoding="utf-8"?>
+<p:sld xmlns:a="http://schemas.openxmlformats.org/drawingml/2006/main" xmlns:r="http://schemas.openxmlformats.org/officeDocument/2006/relationships" xmlns:p="http://schemas.openxmlformats.org/presentationml/2006/main">
+  <p:cSld>
+    <p:spTree>
+      <p:nvGrpSpPr>
+        <p:cNvPr id="1" name=""/>
+        <p:cNvGrpSpPr/>
+        <p:nvPr/>
+      </p:nvGrpSpPr>
+      <p:grpSpPr>
+        <a:xfrm>
+          <a:off x="0" y="0"/>
+          <a:ext cx="0" cy="0"/>
+          <a:chOff x="0" y="0"/>
+          <a:chExt cx="0" cy="0"/>
+        </a:xfrm>
+      </p:grpSpPr>
+      <p:sp>
+        <p:nvSpPr>
           <p:cNvPr id="3" name="Inhaltsplatzhalter 2">
             <a:extLst>
               <a:ext uri="{FF2B5EF4-FFF2-40B4-BE49-F238E27FC236}">
@@ -18685,7 +19117,7 @@
           <a:p>
             <a:fld id="{61696EC4-B4CF-4701-AD06-A8439D6D8E12}" type="slidenum">
               <a:rPr lang="de-DE" smtClean="0"/>
-              <a:t>7</a:t>
+              <a:t>8</a:t>
             </a:fld>
             <a:endParaRPr lang="de-DE"/>
           </a:p>
@@ -18770,7 +19202,7 @@
 </p:sld>
 </file>
 
-<file path=ppt/slides/slide8.xml><?xml version="1.0" encoding="utf-8"?>
+<file path=ppt/slides/slide9.xml><?xml version="1.0" encoding="utf-8"?>
 <p:sld xmlns:a="http://schemas.openxmlformats.org/drawingml/2006/main" xmlns:r="http://schemas.openxmlformats.org/officeDocument/2006/relationships" xmlns:p="http://schemas.openxmlformats.org/presentationml/2006/main">
   <p:cSld>
     <p:spTree>
@@ -18999,7 +19431,7 @@
           <a:p>
             <a:fld id="{61696EC4-B4CF-4701-AD06-A8439D6D8E12}" type="slidenum">
               <a:rPr lang="en-US" noProof="0" smtClean="0"/>
-              <a:t>8</a:t>
+              <a:t>9</a:t>
             </a:fld>
             <a:endParaRPr lang="en-US" noProof="0"/>
           </a:p>
@@ -19040,234 +19472,6 @@
         <p14:creationId xmlns:p14="http://schemas.microsoft.com/office/powerpoint/2010/main" val="1227658728"/>
       </p:ext>
     </p:extLst>
-  </p:cSld>
-  <p:clrMapOvr>
-    <a:masterClrMapping/>
-  </p:clrMapOvr>
-</p:sld>
-</file>
-
-<file path=ppt/slides/slide9.xml><?xml version="1.0" encoding="utf-8"?>
-<p:sld xmlns:a="http://schemas.openxmlformats.org/drawingml/2006/main" xmlns:r="http://schemas.openxmlformats.org/officeDocument/2006/relationships" xmlns:p="http://schemas.openxmlformats.org/presentationml/2006/main" show="0">
-  <p:cSld>
-    <p:spTree>
-      <p:nvGrpSpPr>
-        <p:cNvPr id="1" name=""/>
-        <p:cNvGrpSpPr/>
-        <p:nvPr/>
-      </p:nvGrpSpPr>
-      <p:grpSpPr>
-        <a:xfrm>
-          <a:off x="0" y="0"/>
-          <a:ext cx="0" cy="0"/>
-          <a:chOff x="0" y="0"/>
-          <a:chExt cx="0" cy="0"/>
-        </a:xfrm>
-      </p:grpSpPr>
-      <p:sp>
-        <p:nvSpPr>
-          <p:cNvPr id="2" name="Titel 1"/>
-          <p:cNvSpPr>
-            <a:spLocks noGrp="1"/>
-          </p:cNvSpPr>
-          <p:nvPr>
-            <p:ph type="ctrTitle"/>
-          </p:nvPr>
-        </p:nvSpPr>
-        <p:spPr>
-          <a:xfrm>
-            <a:off x="440267" y="1348141"/>
-            <a:ext cx="11232444" cy="2387600"/>
-          </a:xfrm>
-        </p:spPr>
-        <p:txBody>
-          <a:bodyPr/>
-          <a:lstStyle/>
-          <a:p>
-            <a:pPr algn="l"/>
-            <a:r>
-              <a:rPr lang="de-DE" dirty="0"/>
-              <a:t>Mobile GIS and LBS – </a:t>
-            </a:r>
-            <a:br>
-              <a:rPr lang="de-DE" dirty="0"/>
-            </a:br>
-            <a:r>
-              <a:rPr lang="de-DE" dirty="0"/>
-              <a:t>KIT Campus App</a:t>
-            </a:r>
-          </a:p>
-        </p:txBody>
-      </p:sp>
-      <p:sp>
-        <p:nvSpPr>
-          <p:cNvPr id="3" name="Untertitel 2"/>
-          <p:cNvSpPr>
-            <a:spLocks noGrp="1"/>
-          </p:cNvSpPr>
-          <p:nvPr>
-            <p:ph type="subTitle" idx="1"/>
-          </p:nvPr>
-        </p:nvSpPr>
-        <p:spPr>
-          <a:xfrm>
-            <a:off x="440267" y="3820137"/>
-            <a:ext cx="9144000" cy="1655762"/>
-          </a:xfrm>
-        </p:spPr>
-        <p:txBody>
-          <a:bodyPr>
-            <a:normAutofit/>
-          </a:bodyPr>
-          <a:lstStyle/>
-          <a:p>
-            <a:pPr algn="l"/>
-            <a:endParaRPr lang="en-US" dirty="0"/>
-          </a:p>
-          <a:p>
-            <a:pPr algn="l"/>
-            <a:r>
-              <a:rPr lang="en-US" sz="2200" dirty="0"/>
-              <a:t>Korvin Brecht; Jasmin Jährling; Elisabeth Kral;</a:t>
-            </a:r>
-            <a:r>
-              <a:rPr lang="de-DE" sz="2200" dirty="0"/>
-              <a:t> Merlin </a:t>
-            </a:r>
-            <a:r>
-              <a:rPr lang="de-DE" sz="2200" dirty="0" err="1"/>
-              <a:t>Pillich</a:t>
-            </a:r>
-            <a:endParaRPr lang="de-DE" sz="2200" dirty="0"/>
-          </a:p>
-          <a:p>
-            <a:pPr algn="l"/>
-            <a:r>
-              <a:rPr lang="de-DE" sz="2200" dirty="0"/>
-              <a:t>Mobile GIS &amp; LBS 2025 - Dr.-Ing. Paul Vincent Kuper</a:t>
-            </a:r>
-          </a:p>
-          <a:p>
-            <a:pPr algn="l"/>
-            <a:endParaRPr lang="en-US" dirty="0">
-              <a:hlinkClick r:id="rId2"/>
-            </a:endParaRPr>
-          </a:p>
-          <a:p>
-            <a:endParaRPr lang="de-DE" dirty="0"/>
-          </a:p>
-        </p:txBody>
-      </p:sp>
-      <p:pic>
-        <p:nvPicPr>
-          <p:cNvPr id="5" name="Grafik 4" descr="Ein Bild, das Schrift, Text, Grafiken, Logo enthält.&#10;&#10;KI-generierte Inhalte können fehlerhaft sein."/>
-          <p:cNvPicPr>
-            <a:picLocks noChangeAspect="1"/>
-          </p:cNvPicPr>
-          <p:nvPr/>
-        </p:nvPicPr>
-        <p:blipFill>
-          <a:blip r:embed="rId3">
-            <a:extLst>
-              <a:ext uri="{28A0092B-C50C-407E-A947-70E740481C1C}">
-                <a14:useLocalDpi xmlns:a14="http://schemas.microsoft.com/office/drawing/2010/main" val="0"/>
-              </a:ext>
-            </a:extLst>
-          </a:blip>
-          <a:stretch>
-            <a:fillRect/>
-          </a:stretch>
-        </p:blipFill>
-        <p:spPr>
-          <a:xfrm>
-            <a:off x="333251" y="402431"/>
-            <a:ext cx="2748616" cy="1255713"/>
-          </a:xfrm>
-          <a:prstGeom prst="rect">
-            <a:avLst/>
-          </a:prstGeom>
-        </p:spPr>
-      </p:pic>
-      <p:sp>
-        <p:nvSpPr>
-          <p:cNvPr id="6" name="Rechteck 5"/>
-          <p:cNvSpPr/>
-          <p:nvPr/>
-        </p:nvSpPr>
-        <p:spPr>
-          <a:xfrm>
-            <a:off x="333251" y="6309360"/>
-            <a:ext cx="11339460" cy="430403"/>
-          </a:xfrm>
-          <a:prstGeom prst="rect">
-            <a:avLst/>
-          </a:prstGeom>
-          <a:solidFill>
-            <a:srgbClr val="32A189"/>
-          </a:solidFill>
-          <a:ln>
-            <a:solidFill>
-              <a:schemeClr val="bg1">
-                <a:lumMod val="75000"/>
-              </a:schemeClr>
-            </a:solidFill>
-          </a:ln>
-        </p:spPr>
-        <p:style>
-          <a:lnRef idx="2">
-            <a:schemeClr val="accent1">
-              <a:shade val="15000"/>
-            </a:schemeClr>
-          </a:lnRef>
-          <a:fillRef idx="1">
-            <a:schemeClr val="accent1"/>
-          </a:fillRef>
-          <a:effectRef idx="0">
-            <a:schemeClr val="accent1"/>
-          </a:effectRef>
-          <a:fontRef idx="minor">
-            <a:schemeClr val="lt1"/>
-          </a:fontRef>
-        </p:style>
-        <p:txBody>
-          <a:bodyPr rtlCol="0" anchor="ctr"/>
-          <a:lstStyle/>
-          <a:p>
-            <a:pPr algn="ctr"/>
-            <a:endParaRPr lang="de-DE" dirty="0"/>
-          </a:p>
-        </p:txBody>
-      </p:sp>
-      <p:sp>
-        <p:nvSpPr>
-          <p:cNvPr id="8" name="Textfeld 7"/>
-          <p:cNvSpPr txBox="1"/>
-          <p:nvPr/>
-        </p:nvSpPr>
-        <p:spPr>
-          <a:xfrm>
-            <a:off x="333252" y="6393756"/>
-            <a:ext cx="4001682" cy="261610"/>
-          </a:xfrm>
-          <a:prstGeom prst="rect">
-            <a:avLst/>
-          </a:prstGeom>
-          <a:noFill/>
-        </p:spPr>
-        <p:txBody>
-          <a:bodyPr wrap="square" rtlCol="0">
-            <a:spAutoFit/>
-          </a:bodyPr>
-          <a:lstStyle/>
-          <a:p>
-            <a:r>
-              <a:rPr lang="de-DE" sz="1100" dirty="0"/>
-              <a:t>KIT – Die Forschungsuniversität der Helmholtz-Gemeinschaft</a:t>
-            </a:r>
-          </a:p>
-        </p:txBody>
-      </p:sp>
-    </p:spTree>
   </p:cSld>
   <p:clrMapOvr>
     <a:masterClrMapping/>

--- a/presentation/finale_präsentation_mobileGIS_G3.pptx
+++ b/presentation/finale_präsentation_mobileGIS_G3.pptx
@@ -3451,7 +3451,7 @@
           <a:p>
             <a:fld id="{BE3AC938-C7E8-444A-A4BB-EABBCAA0387F}" type="slidenum">
               <a:rPr lang="de-DE" smtClean="0"/>
-              <a:t>‹#›</a:t>
+              <a:t>‹Nr.›</a:t>
             </a:fld>
             <a:endParaRPr lang="de-DE" dirty="0"/>
           </a:p>
@@ -4367,7 +4367,7 @@
           <a:p>
             <a:fld id="{1152D26F-D91F-4BDA-B7C2-0B45ED53E507}" type="slidenum">
               <a:rPr lang="de-DE" smtClean="0"/>
-              <a:t>‹#›</a:t>
+              <a:t>‹Nr.›</a:t>
             </a:fld>
             <a:endParaRPr lang="de-DE" dirty="0"/>
           </a:p>
@@ -4534,7 +4534,7 @@
           <a:p>
             <a:fld id="{1152D26F-D91F-4BDA-B7C2-0B45ED53E507}" type="slidenum">
               <a:rPr lang="de-DE" smtClean="0"/>
-              <a:t>‹#›</a:t>
+              <a:t>‹Nr.›</a:t>
             </a:fld>
             <a:endParaRPr lang="de-DE" dirty="0"/>
           </a:p>
@@ -4711,7 +4711,7 @@
           <a:p>
             <a:fld id="{1152D26F-D91F-4BDA-B7C2-0B45ED53E507}" type="slidenum">
               <a:rPr lang="de-DE" smtClean="0"/>
-              <a:t>‹#›</a:t>
+              <a:t>‹Nr.›</a:t>
             </a:fld>
             <a:endParaRPr lang="de-DE" dirty="0"/>
           </a:p>
@@ -5794,7 +5794,7 @@
           <a:p>
             <a:fld id="{61696EC4-B4CF-4701-AD06-A8439D6D8E12}" type="slidenum">
               <a:rPr lang="en-US" noProof="0" smtClean="0"/>
-              <a:t>‹#›</a:t>
+              <a:t>‹Nr.›</a:t>
             </a:fld>
             <a:endParaRPr lang="en-US" noProof="0"/>
           </a:p>
@@ -6155,7 +6155,7 @@
           <a:p>
             <a:fld id="{61696EC4-B4CF-4701-AD06-A8439D6D8E12}" type="slidenum">
               <a:rPr lang="de-DE" smtClean="0"/>
-              <a:t>‹#›</a:t>
+              <a:t>‹Nr.›</a:t>
             </a:fld>
             <a:endParaRPr lang="de-DE"/>
           </a:p>
@@ -6446,7 +6446,7 @@
           <a:p>
             <a:fld id="{61696EC4-B4CF-4701-AD06-A8439D6D8E12}" type="slidenum">
               <a:rPr lang="de-DE" smtClean="0"/>
-              <a:t>‹#›</a:t>
+              <a:t>‹Nr.›</a:t>
             </a:fld>
             <a:endParaRPr lang="de-DE"/>
           </a:p>
@@ -6963,7 +6963,7 @@
           <a:p>
             <a:fld id="{61696EC4-B4CF-4701-AD06-A8439D6D8E12}" type="slidenum">
               <a:rPr lang="de-DE" smtClean="0"/>
-              <a:t>‹#›</a:t>
+              <a:t>‹Nr.›</a:t>
             </a:fld>
             <a:endParaRPr lang="de-DE"/>
           </a:p>
@@ -7410,7 +7410,7 @@
           <a:p>
             <a:fld id="{61696EC4-B4CF-4701-AD06-A8439D6D8E12}" type="slidenum">
               <a:rPr lang="de-DE" smtClean="0"/>
-              <a:t>‹#›</a:t>
+              <a:t>‹Nr.›</a:t>
             </a:fld>
             <a:endParaRPr lang="de-DE"/>
           </a:p>
@@ -7537,7 +7537,7 @@
           <a:p>
             <a:fld id="{61696EC4-B4CF-4701-AD06-A8439D6D8E12}" type="slidenum">
               <a:rPr lang="de-DE" smtClean="0"/>
-              <a:t>‹#›</a:t>
+              <a:t>‹Nr.›</a:t>
             </a:fld>
             <a:endParaRPr lang="de-DE"/>
           </a:p>
@@ -7760,7 +7760,7 @@
           <a:p>
             <a:fld id="{1152D26F-D91F-4BDA-B7C2-0B45ED53E507}" type="slidenum">
               <a:rPr lang="de-DE" smtClean="0"/>
-              <a:t>‹#›</a:t>
+              <a:t>‹Nr.›</a:t>
             </a:fld>
             <a:endParaRPr lang="de-DE" dirty="0"/>
           </a:p>
@@ -7831,7 +7831,7 @@
           <a:p>
             <a:fld id="{61696EC4-B4CF-4701-AD06-A8439D6D8E12}" type="slidenum">
               <a:rPr lang="de-DE" smtClean="0"/>
-              <a:t>‹#›</a:t>
+              <a:t>‹Nr.›</a:t>
             </a:fld>
             <a:endParaRPr lang="de-DE"/>
           </a:p>
@@ -8032,7 +8032,7 @@
           <a:p>
             <a:fld id="{61696EC4-B4CF-4701-AD06-A8439D6D8E12}" type="slidenum">
               <a:rPr lang="de-DE" smtClean="0"/>
-              <a:t>‹#›</a:t>
+              <a:t>‹Nr.›</a:t>
             </a:fld>
             <a:endParaRPr lang="de-DE"/>
           </a:p>
@@ -8159,7 +8159,7 @@
           <a:p>
             <a:fld id="{61696EC4-B4CF-4701-AD06-A8439D6D8E12}" type="slidenum">
               <a:rPr lang="de-DE" smtClean="0"/>
-              <a:t>‹#›</a:t>
+              <a:t>‹Nr.›</a:t>
             </a:fld>
             <a:endParaRPr lang="de-DE"/>
           </a:p>
@@ -8371,7 +8371,7 @@
           <a:p>
             <a:fld id="{61696EC4-B4CF-4701-AD06-A8439D6D8E12}" type="slidenum">
               <a:rPr lang="de-DE" smtClean="0"/>
-              <a:t>‹#›</a:t>
+              <a:t>‹Nr.›</a:t>
             </a:fld>
             <a:endParaRPr lang="de-DE"/>
           </a:p>
@@ -8572,7 +8572,7 @@
           <a:p>
             <a:fld id="{61696EC4-B4CF-4701-AD06-A8439D6D8E12}" type="slidenum">
               <a:rPr lang="de-DE" smtClean="0"/>
-              <a:t>‹#›</a:t>
+              <a:t>‹Nr.›</a:t>
             </a:fld>
             <a:endParaRPr lang="de-DE"/>
           </a:p>
@@ -8829,7 +8829,7 @@
           <a:p>
             <a:fld id="{61696EC4-B4CF-4701-AD06-A8439D6D8E12}" type="slidenum">
               <a:rPr lang="de-DE" smtClean="0"/>
-              <a:t>‹#›</a:t>
+              <a:t>‹Nr.›</a:t>
             </a:fld>
             <a:endParaRPr lang="de-DE"/>
           </a:p>
@@ -9020,7 +9020,7 @@
           <a:p>
             <a:fld id="{61696EC4-B4CF-4701-AD06-A8439D6D8E12}" type="slidenum">
               <a:rPr lang="de-DE" smtClean="0"/>
-              <a:t>‹#›</a:t>
+              <a:t>‹Nr.›</a:t>
             </a:fld>
             <a:endParaRPr lang="de-DE"/>
           </a:p>
@@ -9346,7 +9346,7 @@
           <a:p>
             <a:fld id="{61696EC4-B4CF-4701-AD06-A8439D6D8E12}" type="slidenum">
               <a:rPr lang="de-DE" smtClean="0"/>
-              <a:t>‹#›</a:t>
+              <a:t>‹Nr.›</a:t>
             </a:fld>
             <a:endParaRPr lang="de-DE"/>
           </a:p>
@@ -9633,7 +9633,7 @@
           <a:p>
             <a:fld id="{61696EC4-B4CF-4701-AD06-A8439D6D8E12}" type="slidenum">
               <a:rPr lang="de-DE" smtClean="0"/>
-              <a:t>‹#›</a:t>
+              <a:t>‹Nr.›</a:t>
             </a:fld>
             <a:endParaRPr lang="de-DE"/>
           </a:p>
@@ -9882,7 +9882,7 @@
           <a:p>
             <a:fld id="{1152D26F-D91F-4BDA-B7C2-0B45ED53E507}" type="slidenum">
               <a:rPr lang="de-DE" smtClean="0"/>
-              <a:t>‹#›</a:t>
+              <a:t>‹Nr.›</a:t>
             </a:fld>
             <a:endParaRPr lang="de-DE" dirty="0"/>
           </a:p>
@@ -10110,7 +10110,7 @@
           <a:p>
             <a:fld id="{1152D26F-D91F-4BDA-B7C2-0B45ED53E507}" type="slidenum">
               <a:rPr lang="de-DE" smtClean="0"/>
-              <a:t>‹#›</a:t>
+              <a:t>‹Nr.›</a:t>
             </a:fld>
             <a:endParaRPr lang="de-DE" dirty="0"/>
           </a:p>
@@ -10473,7 +10473,7 @@
           <a:p>
             <a:fld id="{1152D26F-D91F-4BDA-B7C2-0B45ED53E507}" type="slidenum">
               <a:rPr lang="de-DE" smtClean="0"/>
-              <a:t>‹#›</a:t>
+              <a:t>‹Nr.›</a:t>
             </a:fld>
             <a:endParaRPr lang="de-DE" dirty="0"/>
           </a:p>
@@ -10589,7 +10589,7 @@
           <a:p>
             <a:fld id="{1152D26F-D91F-4BDA-B7C2-0B45ED53E507}" type="slidenum">
               <a:rPr lang="de-DE" smtClean="0"/>
-              <a:t>‹#›</a:t>
+              <a:t>‹Nr.›</a:t>
             </a:fld>
             <a:endParaRPr lang="de-DE" dirty="0"/>
           </a:p>
@@ -10683,7 +10683,7 @@
           <a:p>
             <a:fld id="{1152D26F-D91F-4BDA-B7C2-0B45ED53E507}" type="slidenum">
               <a:rPr lang="de-DE" smtClean="0"/>
-              <a:t>‹#›</a:t>
+              <a:t>‹Nr.›</a:t>
             </a:fld>
             <a:endParaRPr lang="de-DE" dirty="0"/>
           </a:p>
@@ -10957,7 +10957,7 @@
           <a:p>
             <a:fld id="{1152D26F-D91F-4BDA-B7C2-0B45ED53E507}" type="slidenum">
               <a:rPr lang="de-DE" smtClean="0"/>
-              <a:t>‹#›</a:t>
+              <a:t>‹Nr.›</a:t>
             </a:fld>
             <a:endParaRPr lang="de-DE" dirty="0"/>
           </a:p>
@@ -11208,7 +11208,7 @@
           <a:p>
             <a:fld id="{1152D26F-D91F-4BDA-B7C2-0B45ED53E507}" type="slidenum">
               <a:rPr lang="de-DE" smtClean="0"/>
-              <a:t>‹#›</a:t>
+              <a:t>‹Nr.›</a:t>
             </a:fld>
             <a:endParaRPr lang="de-DE" dirty="0"/>
           </a:p>
@@ -11454,7 +11454,7 @@
           <a:p>
             <a:fld id="{1152D26F-D91F-4BDA-B7C2-0B45ED53E507}" type="slidenum">
               <a:rPr lang="de-DE" smtClean="0"/>
-              <a:t>‹#›</a:t>
+              <a:t>‹Nr.›</a:t>
             </a:fld>
             <a:endParaRPr lang="de-DE" dirty="0"/>
           </a:p>
@@ -11972,7 +11972,7 @@
             <a:fld id="{61696EC4-B4CF-4701-AD06-A8439D6D8E12}" type="slidenum">
               <a:rPr lang="en-US" smtClean="0"/>
               <a:pPr/>
-              <a:t>‹#›</a:t>
+              <a:t>‹Nr.›</a:t>
             </a:fld>
             <a:endParaRPr lang="en-US" dirty="0"/>
           </a:p>
@@ -18538,24 +18538,44 @@
           <a:bodyPr/>
           <a:lstStyle/>
           <a:p>
+            <a:pPr>
+              <a:lnSpc>
+                <a:spcPct val="150000"/>
+              </a:lnSpc>
+            </a:pPr>
             <a:r>
               <a:rPr lang="en-US" dirty="0"/>
               <a:t>Cross-Origin Resource Sharing (CORS) Settings on WFS-Server</a:t>
             </a:r>
           </a:p>
           <a:p>
+            <a:pPr>
+              <a:lnSpc>
+                <a:spcPct val="150000"/>
+              </a:lnSpc>
+            </a:pPr>
             <a:r>
               <a:rPr lang="en-US" dirty="0"/>
               <a:t>Fetching Files in JavaScript on iOS</a:t>
             </a:r>
           </a:p>
           <a:p>
+            <a:pPr>
+              <a:lnSpc>
+                <a:spcPct val="150000"/>
+              </a:lnSpc>
+            </a:pPr>
             <a:r>
               <a:rPr lang="en-US" dirty="0"/>
               <a:t>Getting the Geolocation on iOS</a:t>
             </a:r>
           </a:p>
           <a:p>
+            <a:pPr>
+              <a:lnSpc>
+                <a:spcPct val="150000"/>
+              </a:lnSpc>
+            </a:pPr>
             <a:r>
               <a:rPr lang="en-US" dirty="0"/>
               <a:t>UI experience when requesting location access inside a WebView on iOS</a:t>
